--- a/docs/Q-Hack_India26_PQC_H365_FINAL.pptx
+++ b/docs/Q-Hack_India26_PQC_H365_FINAL.pptx
@@ -4,6 +4,9 @@
   <p:sldMasterIdLst>
     <p:sldMasterId id="2147483648" r:id="rId1"/>
   </p:sldMasterIdLst>
+  <p:notesMasterIdLst>
+    <p:notesMasterId r:id="rId12"/>
+  </p:notesMasterIdLst>
   <p:sldIdLst>
     <p:sldId id="256" r:id="rId2"/>
     <p:sldId id="257" r:id="rId3"/>
@@ -21,7 +24,7 @@
   <p:embeddedFontLst>
     <p:embeddedFont>
       <p:font typeface="IBM Plex Sans" panose="020B0503050203000203" pitchFamily="34" charset="0"/>
-      <p:regular r:id="rId12"/>
+      <p:regular r:id="rId13"/>
     </p:embeddedFont>
   </p:embeddedFontLst>
   <p:defaultTextStyle>
@@ -136,6 +139,440 @@
     </p:ext>
   </p:extLst>
 </p:presentation>
+</file>
+
+<file path=ppt/notesMasters/notesMaster1.xml><?xml version="1.0" encoding="utf-8"?>
+<p:notesMaster xmlns:a="http://schemas.openxmlformats.org/drawingml/2006/main" xmlns:r="http://schemas.openxmlformats.org/officeDocument/2006/relationships" xmlns:p="http://schemas.openxmlformats.org/presentationml/2006/main">
+  <p:cSld>
+    <p:bg>
+      <p:bgRef idx="1001">
+        <a:schemeClr val="bg1"/>
+      </p:bgRef>
+    </p:bg>
+    <p:spTree>
+      <p:nvGrpSpPr>
+        <p:cNvPr id="1" name=""/>
+        <p:cNvGrpSpPr/>
+        <p:nvPr/>
+      </p:nvGrpSpPr>
+      <p:grpSpPr>
+        <a:xfrm>
+          <a:off x="0" y="0"/>
+          <a:ext cx="0" cy="0"/>
+          <a:chOff x="0" y="0"/>
+          <a:chExt cx="0" cy="0"/>
+        </a:xfrm>
+      </p:grpSpPr>
+      <p:sp>
+        <p:nvSpPr>
+          <p:cNvPr id="2" name="Header Placeholder 1"/>
+          <p:cNvSpPr>
+            <a:spLocks noGrp="1"/>
+          </p:cNvSpPr>
+          <p:nvPr>
+            <p:ph type="hdr" sz="quarter"/>
+          </p:nvPr>
+        </p:nvSpPr>
+        <p:spPr>
+          <a:xfrm>
+            <a:off x="0" y="0"/>
+            <a:ext cx="2971800" cy="458788"/>
+          </a:xfrm>
+          <a:prstGeom prst="rect">
+            <a:avLst/>
+          </a:prstGeom>
+        </p:spPr>
+        <p:txBody>
+          <a:bodyPr vert="horz" lIns="91440" tIns="45720" rIns="91440" bIns="45720" rtlCol="0"/>
+          <a:lstStyle>
+            <a:lvl1pPr algn="l">
+              <a:defRPr sz="1200"/>
+            </a:lvl1pPr>
+          </a:lstStyle>
+          <a:p>
+            <a:endParaRPr lang="en-ZM"/>
+          </a:p>
+        </p:txBody>
+      </p:sp>
+      <p:sp>
+        <p:nvSpPr>
+          <p:cNvPr id="3" name="Date Placeholder 2"/>
+          <p:cNvSpPr>
+            <a:spLocks noGrp="1"/>
+          </p:cNvSpPr>
+          <p:nvPr>
+            <p:ph type="dt" idx="1"/>
+          </p:nvPr>
+        </p:nvSpPr>
+        <p:spPr>
+          <a:xfrm>
+            <a:off x="3884613" y="0"/>
+            <a:ext cx="2971800" cy="458788"/>
+          </a:xfrm>
+          <a:prstGeom prst="rect">
+            <a:avLst/>
+          </a:prstGeom>
+        </p:spPr>
+        <p:txBody>
+          <a:bodyPr vert="horz" lIns="91440" tIns="45720" rIns="91440" bIns="45720" rtlCol="0"/>
+          <a:lstStyle>
+            <a:lvl1pPr algn="r">
+              <a:defRPr sz="1200"/>
+            </a:lvl1pPr>
+          </a:lstStyle>
+          <a:p>
+            <a:fld id="{C99104EF-C2EE-4D86-B8EA-33E0378EE266}" type="datetimeFigureOut">
+              <a:rPr lang="en-ZM" smtClean="0"/>
+              <a:t>06/10/2026</a:t>
+            </a:fld>
+            <a:endParaRPr lang="en-ZM"/>
+          </a:p>
+        </p:txBody>
+      </p:sp>
+      <p:sp>
+        <p:nvSpPr>
+          <p:cNvPr id="4" name="Slide Image Placeholder 3"/>
+          <p:cNvSpPr>
+            <a:spLocks noGrp="1" noRot="1" noChangeAspect="1"/>
+          </p:cNvSpPr>
+          <p:nvPr>
+            <p:ph type="sldImg" idx="2"/>
+          </p:nvPr>
+        </p:nvSpPr>
+        <p:spPr>
+          <a:xfrm>
+            <a:off x="685800" y="1143000"/>
+            <a:ext cx="5486400" cy="3086100"/>
+          </a:xfrm>
+          <a:prstGeom prst="rect">
+            <a:avLst/>
+          </a:prstGeom>
+          <a:noFill/>
+          <a:ln w="12700">
+            <a:solidFill>
+              <a:prstClr val="black"/>
+            </a:solidFill>
+          </a:ln>
+        </p:spPr>
+        <p:txBody>
+          <a:bodyPr vert="horz" lIns="91440" tIns="45720" rIns="91440" bIns="45720" rtlCol="0" anchor="ctr"/>
+          <a:lstStyle/>
+          <a:p>
+            <a:endParaRPr lang="en-ZM"/>
+          </a:p>
+        </p:txBody>
+      </p:sp>
+      <p:sp>
+        <p:nvSpPr>
+          <p:cNvPr id="5" name="Notes Placeholder 4"/>
+          <p:cNvSpPr>
+            <a:spLocks noGrp="1"/>
+          </p:cNvSpPr>
+          <p:nvPr>
+            <p:ph type="body" sz="quarter" idx="3"/>
+          </p:nvPr>
+        </p:nvSpPr>
+        <p:spPr>
+          <a:xfrm>
+            <a:off x="685800" y="4400550"/>
+            <a:ext cx="5486400" cy="3600450"/>
+          </a:xfrm>
+          <a:prstGeom prst="rect">
+            <a:avLst/>
+          </a:prstGeom>
+        </p:spPr>
+        <p:txBody>
+          <a:bodyPr vert="horz" lIns="91440" tIns="45720" rIns="91440" bIns="45720" rtlCol="0"/>
+          <a:lstStyle/>
+          <a:p>
+            <a:pPr lvl="0"/>
+            <a:r>
+              <a:rPr lang="en-US"/>
+              <a:t>Click to edit Master text styles</a:t>
+            </a:r>
+          </a:p>
+          <a:p>
+            <a:pPr lvl="1"/>
+            <a:r>
+              <a:rPr lang="en-US"/>
+              <a:t>Second level</a:t>
+            </a:r>
+          </a:p>
+          <a:p>
+            <a:pPr lvl="2"/>
+            <a:r>
+              <a:rPr lang="en-US"/>
+              <a:t>Third level</a:t>
+            </a:r>
+          </a:p>
+          <a:p>
+            <a:pPr lvl="3"/>
+            <a:r>
+              <a:rPr lang="en-US"/>
+              <a:t>Fourth level</a:t>
+            </a:r>
+          </a:p>
+          <a:p>
+            <a:pPr lvl="4"/>
+            <a:r>
+              <a:rPr lang="en-US"/>
+              <a:t>Fifth level</a:t>
+            </a:r>
+            <a:endParaRPr lang="en-ZM"/>
+          </a:p>
+        </p:txBody>
+      </p:sp>
+      <p:sp>
+        <p:nvSpPr>
+          <p:cNvPr id="6" name="Footer Placeholder 5"/>
+          <p:cNvSpPr>
+            <a:spLocks noGrp="1"/>
+          </p:cNvSpPr>
+          <p:nvPr>
+            <p:ph type="ftr" sz="quarter" idx="4"/>
+          </p:nvPr>
+        </p:nvSpPr>
+        <p:spPr>
+          <a:xfrm>
+            <a:off x="0" y="8685213"/>
+            <a:ext cx="2971800" cy="458787"/>
+          </a:xfrm>
+          <a:prstGeom prst="rect">
+            <a:avLst/>
+          </a:prstGeom>
+        </p:spPr>
+        <p:txBody>
+          <a:bodyPr vert="horz" lIns="91440" tIns="45720" rIns="91440" bIns="45720" rtlCol="0" anchor="b"/>
+          <a:lstStyle>
+            <a:lvl1pPr algn="l">
+              <a:defRPr sz="1200"/>
+            </a:lvl1pPr>
+          </a:lstStyle>
+          <a:p>
+            <a:endParaRPr lang="en-ZM"/>
+          </a:p>
+        </p:txBody>
+      </p:sp>
+      <p:sp>
+        <p:nvSpPr>
+          <p:cNvPr id="7" name="Slide Number Placeholder 6"/>
+          <p:cNvSpPr>
+            <a:spLocks noGrp="1"/>
+          </p:cNvSpPr>
+          <p:nvPr>
+            <p:ph type="sldNum" sz="quarter" idx="5"/>
+          </p:nvPr>
+        </p:nvSpPr>
+        <p:spPr>
+          <a:xfrm>
+            <a:off x="3884613" y="8685213"/>
+            <a:ext cx="2971800" cy="458787"/>
+          </a:xfrm>
+          <a:prstGeom prst="rect">
+            <a:avLst/>
+          </a:prstGeom>
+        </p:spPr>
+        <p:txBody>
+          <a:bodyPr vert="horz" lIns="91440" tIns="45720" rIns="91440" bIns="45720" rtlCol="0" anchor="b"/>
+          <a:lstStyle>
+            <a:lvl1pPr algn="r">
+              <a:defRPr sz="1200"/>
+            </a:lvl1pPr>
+          </a:lstStyle>
+          <a:p>
+            <a:fld id="{DC6E7D22-39E0-4888-BA6F-7A26796E4ECC}" type="slidenum">
+              <a:rPr lang="en-ZM" smtClean="0"/>
+              <a:t>‹#›</a:t>
+            </a:fld>
+            <a:endParaRPr lang="en-ZM"/>
+          </a:p>
+        </p:txBody>
+      </p:sp>
+    </p:spTree>
+    <p:extLst>
+      <p:ext uri="{BB962C8B-B14F-4D97-AF65-F5344CB8AC3E}">
+        <p14:creationId xmlns:p14="http://schemas.microsoft.com/office/powerpoint/2010/main" val="960295899"/>
+      </p:ext>
+    </p:extLst>
+  </p:cSld>
+  <p:clrMap bg1="lt1" tx1="dk1" bg2="lt2" tx2="dk2" accent1="accent1" accent2="accent2" accent3="accent3" accent4="accent4" accent5="accent5" accent6="accent6" hlink="hlink" folHlink="folHlink"/>
+  <p:notesStyle>
+    <a:lvl1pPr marL="0" algn="l" defTabSz="914400" rtl="0" eaLnBrk="1" latinLnBrk="0" hangingPunct="1">
+      <a:defRPr sz="1200" kern="1200">
+        <a:solidFill>
+          <a:schemeClr val="tx1"/>
+        </a:solidFill>
+        <a:latin typeface="+mn-lt"/>
+        <a:ea typeface="+mn-ea"/>
+        <a:cs typeface="+mn-cs"/>
+      </a:defRPr>
+    </a:lvl1pPr>
+    <a:lvl2pPr marL="457200" algn="l" defTabSz="914400" rtl="0" eaLnBrk="1" latinLnBrk="0" hangingPunct="1">
+      <a:defRPr sz="1200" kern="1200">
+        <a:solidFill>
+          <a:schemeClr val="tx1"/>
+        </a:solidFill>
+        <a:latin typeface="+mn-lt"/>
+        <a:ea typeface="+mn-ea"/>
+        <a:cs typeface="+mn-cs"/>
+      </a:defRPr>
+    </a:lvl2pPr>
+    <a:lvl3pPr marL="914400" algn="l" defTabSz="914400" rtl="0" eaLnBrk="1" latinLnBrk="0" hangingPunct="1">
+      <a:defRPr sz="1200" kern="1200">
+        <a:solidFill>
+          <a:schemeClr val="tx1"/>
+        </a:solidFill>
+        <a:latin typeface="+mn-lt"/>
+        <a:ea typeface="+mn-ea"/>
+        <a:cs typeface="+mn-cs"/>
+      </a:defRPr>
+    </a:lvl3pPr>
+    <a:lvl4pPr marL="1371600" algn="l" defTabSz="914400" rtl="0" eaLnBrk="1" latinLnBrk="0" hangingPunct="1">
+      <a:defRPr sz="1200" kern="1200">
+        <a:solidFill>
+          <a:schemeClr val="tx1"/>
+        </a:solidFill>
+        <a:latin typeface="+mn-lt"/>
+        <a:ea typeface="+mn-ea"/>
+        <a:cs typeface="+mn-cs"/>
+      </a:defRPr>
+    </a:lvl4pPr>
+    <a:lvl5pPr marL="1828800" algn="l" defTabSz="914400" rtl="0" eaLnBrk="1" latinLnBrk="0" hangingPunct="1">
+      <a:defRPr sz="1200" kern="1200">
+        <a:solidFill>
+          <a:schemeClr val="tx1"/>
+        </a:solidFill>
+        <a:latin typeface="+mn-lt"/>
+        <a:ea typeface="+mn-ea"/>
+        <a:cs typeface="+mn-cs"/>
+      </a:defRPr>
+    </a:lvl5pPr>
+    <a:lvl6pPr marL="2286000" algn="l" defTabSz="914400" rtl="0" eaLnBrk="1" latinLnBrk="0" hangingPunct="1">
+      <a:defRPr sz="1200" kern="1200">
+        <a:solidFill>
+          <a:schemeClr val="tx1"/>
+        </a:solidFill>
+        <a:latin typeface="+mn-lt"/>
+        <a:ea typeface="+mn-ea"/>
+        <a:cs typeface="+mn-cs"/>
+      </a:defRPr>
+    </a:lvl6pPr>
+    <a:lvl7pPr marL="2743200" algn="l" defTabSz="914400" rtl="0" eaLnBrk="1" latinLnBrk="0" hangingPunct="1">
+      <a:defRPr sz="1200" kern="1200">
+        <a:solidFill>
+          <a:schemeClr val="tx1"/>
+        </a:solidFill>
+        <a:latin typeface="+mn-lt"/>
+        <a:ea typeface="+mn-ea"/>
+        <a:cs typeface="+mn-cs"/>
+      </a:defRPr>
+    </a:lvl7pPr>
+    <a:lvl8pPr marL="3200400" algn="l" defTabSz="914400" rtl="0" eaLnBrk="1" latinLnBrk="0" hangingPunct="1">
+      <a:defRPr sz="1200" kern="1200">
+        <a:solidFill>
+          <a:schemeClr val="tx1"/>
+        </a:solidFill>
+        <a:latin typeface="+mn-lt"/>
+        <a:ea typeface="+mn-ea"/>
+        <a:cs typeface="+mn-cs"/>
+      </a:defRPr>
+    </a:lvl8pPr>
+    <a:lvl9pPr marL="3657600" algn="l" defTabSz="914400" rtl="0" eaLnBrk="1" latinLnBrk="0" hangingPunct="1">
+      <a:defRPr sz="1200" kern="1200">
+        <a:solidFill>
+          <a:schemeClr val="tx1"/>
+        </a:solidFill>
+        <a:latin typeface="+mn-lt"/>
+        <a:ea typeface="+mn-ea"/>
+        <a:cs typeface="+mn-cs"/>
+      </a:defRPr>
+    </a:lvl9pPr>
+  </p:notesStyle>
+</p:notesMaster>
+</file>
+
+<file path=ppt/notesSlides/notesSlide1.xml><?xml version="1.0" encoding="utf-8"?>
+<p:notes xmlns:a="http://schemas.openxmlformats.org/drawingml/2006/main" xmlns:r="http://schemas.openxmlformats.org/officeDocument/2006/relationships" xmlns:p="http://schemas.openxmlformats.org/presentationml/2006/main">
+  <p:cSld>
+    <p:spTree>
+      <p:nvGrpSpPr>
+        <p:cNvPr id="1" name=""/>
+        <p:cNvGrpSpPr/>
+        <p:nvPr/>
+      </p:nvGrpSpPr>
+      <p:grpSpPr>
+        <a:xfrm>
+          <a:off x="0" y="0"/>
+          <a:ext cx="0" cy="0"/>
+          <a:chOff x="0" y="0"/>
+          <a:chExt cx="0" cy="0"/>
+        </a:xfrm>
+      </p:grpSpPr>
+      <p:sp>
+        <p:nvSpPr>
+          <p:cNvPr id="2" name="Slide Image Placeholder 1"/>
+          <p:cNvSpPr>
+            <a:spLocks noGrp="1" noRot="1" noChangeAspect="1"/>
+          </p:cNvSpPr>
+          <p:nvPr>
+            <p:ph type="sldImg"/>
+          </p:nvPr>
+        </p:nvSpPr>
+        <p:spPr/>
+      </p:sp>
+      <p:sp>
+        <p:nvSpPr>
+          <p:cNvPr id="3" name="Notes Placeholder 2"/>
+          <p:cNvSpPr>
+            <a:spLocks noGrp="1"/>
+          </p:cNvSpPr>
+          <p:nvPr>
+            <p:ph type="body" idx="1"/>
+          </p:nvPr>
+        </p:nvSpPr>
+        <p:spPr/>
+        <p:txBody>
+          <a:bodyPr/>
+          <a:lstStyle/>
+          <a:p>
+            <a:endParaRPr lang="en-ZM" dirty="0"/>
+          </a:p>
+        </p:txBody>
+      </p:sp>
+      <p:sp>
+        <p:nvSpPr>
+          <p:cNvPr id="4" name="Slide Number Placeholder 3"/>
+          <p:cNvSpPr>
+            <a:spLocks noGrp="1"/>
+          </p:cNvSpPr>
+          <p:nvPr>
+            <p:ph type="sldNum" sz="quarter" idx="5"/>
+          </p:nvPr>
+        </p:nvSpPr>
+        <p:spPr/>
+        <p:txBody>
+          <a:bodyPr/>
+          <a:lstStyle/>
+          <a:p>
+            <a:fld id="{DC6E7D22-39E0-4888-BA6F-7A26796E4ECC}" type="slidenum">
+              <a:rPr lang="en-ZM" smtClean="0"/>
+              <a:t>6</a:t>
+            </a:fld>
+            <a:endParaRPr lang="en-ZM"/>
+          </a:p>
+        </p:txBody>
+      </p:sp>
+    </p:spTree>
+    <p:extLst>
+      <p:ext uri="{BB962C8B-B14F-4D97-AF65-F5344CB8AC3E}">
+        <p14:creationId xmlns:p14="http://schemas.microsoft.com/office/powerpoint/2010/main" val="3242765581"/>
+      </p:ext>
+    </p:extLst>
+  </p:cSld>
+  <p:clrMapOvr>
+    <a:masterClrMapping/>
+  </p:clrMapOvr>
+</p:notes>
 </file>
 
 <file path=ppt/slideLayouts/slideLayout1.xml><?xml version="1.0" encoding="utf-8"?>
@@ -3146,7 +3583,7 @@
         </p:nvGrpSpPr>
         <p:grpSpPr>
           <a:xfrm>
-            <a:off x="2928206" y="9780631"/>
+            <a:off x="7444496" y="8515033"/>
             <a:ext cx="2625805" cy="830953"/>
             <a:chOff x="0" y="0"/>
             <a:chExt cx="5816600" cy="1840700"/>
@@ -3207,7 +3644,7 @@
         </p:nvGrpSpPr>
         <p:grpSpPr>
           <a:xfrm>
-            <a:off x="13367623" y="9656173"/>
+            <a:off x="14259533" y="1368890"/>
             <a:ext cx="2625805" cy="830953"/>
             <a:chOff x="0" y="0"/>
             <a:chExt cx="5816600" cy="1840700"/>
@@ -3268,8 +3705,8 @@
         </p:nvGrpSpPr>
         <p:grpSpPr>
           <a:xfrm>
-            <a:off x="12140647" y="2730987"/>
-            <a:ext cx="5634028" cy="6185198"/>
+            <a:off x="13605292" y="6669730"/>
+            <a:ext cx="4283725" cy="3048000"/>
             <a:chOff x="0" y="0"/>
             <a:chExt cx="15229294" cy="16719156"/>
           </a:xfrm>
@@ -3564,8 +4001,8 @@
         </p:nvSpPr>
         <p:spPr>
           <a:xfrm>
-            <a:off x="5554011" y="1808824"/>
-            <a:ext cx="5931138" cy="1977046"/>
+            <a:off x="-99195" y="2047140"/>
+            <a:ext cx="5613398" cy="1646717"/>
           </a:xfrm>
           <a:custGeom>
             <a:avLst/>
@@ -3610,7 +4047,7 @@
         </p:nvGrpSpPr>
         <p:grpSpPr>
           <a:xfrm>
-            <a:off x="491128" y="3053659"/>
+            <a:off x="6084636" y="2515261"/>
             <a:ext cx="5382395" cy="1514735"/>
             <a:chOff x="0" y="0"/>
             <a:chExt cx="812800" cy="161557"/>
@@ -3721,7 +4158,7 @@
         </p:nvGrpSpPr>
         <p:grpSpPr>
           <a:xfrm>
-            <a:off x="513311" y="4554281"/>
+            <a:off x="6109569" y="4206944"/>
             <a:ext cx="5382397" cy="1580079"/>
             <a:chOff x="0" y="-28575"/>
             <a:chExt cx="1111820" cy="279936"/>
@@ -3832,7 +4269,7 @@
         </p:nvGrpSpPr>
         <p:grpSpPr>
           <a:xfrm>
-            <a:off x="491128" y="6152199"/>
+            <a:off x="6087386" y="6175114"/>
             <a:ext cx="5404580" cy="1201797"/>
             <a:chOff x="0" y="0"/>
             <a:chExt cx="607385" cy="161557"/>
@@ -3943,8 +4380,8 @@
         </p:nvGrpSpPr>
         <p:grpSpPr>
           <a:xfrm>
-            <a:off x="513311" y="7525440"/>
-            <a:ext cx="5382396" cy="2193681"/>
+            <a:off x="5528588" y="7551592"/>
+            <a:ext cx="6917606" cy="2193681"/>
             <a:chOff x="0" y="0"/>
             <a:chExt cx="1417586" cy="169083"/>
           </a:xfrm>
@@ -4312,7 +4749,21 @@
           </a:bodyPr>
           <a:lstStyle/>
           <a:p>
-            <a:r>
+            <a:pPr algn="l">
+              <a:lnSpc>
+                <a:spcPts val="2239"/>
+              </a:lnSpc>
+            </a:pPr>
+            <a:r>
+              <a:rPr lang="en-US" sz="1599">
+                <a:solidFill>
+                  <a:srgbClr val="000000"/>
+                </a:solidFill>
+                <a:latin typeface="IBM Plex Sans"/>
+                <a:ea typeface="IBM Plex Sans"/>
+                <a:cs typeface="IBM Plex Sans"/>
+                <a:sym typeface="IBM Plex Sans"/>
+              </a:rPr>
               <a:t>Q-Hack India 2026</a:t>
             </a:r>
           </a:p>
@@ -4326,8 +4777,8 @@
         </p:nvSpPr>
         <p:spPr>
           <a:xfrm>
-            <a:off x="1028700" y="3303213"/>
-            <a:ext cx="2571155" cy="580391"/>
+            <a:off x="7782191" y="2574324"/>
+            <a:ext cx="2571155" cy="1161344"/>
           </a:xfrm>
           <a:prstGeom prst="rect">
             <a:avLst/>
@@ -4339,7 +4790,19 @@
           </a:bodyPr>
           <a:lstStyle/>
           <a:p>
-            <a:r>
+            <a:pPr algn="l">
+              <a:lnSpc>
+                <a:spcPts val="4759"/>
+              </a:lnSpc>
+              <a:defRPr sz="2800" b="1">
+                <a:latin typeface="IBM Plex Sans"/>
+              </a:defRPr>
+            </a:pPr>
+            <a:r>
+              <a:rPr dirty="0">
+                <a:latin typeface="Times New Roman" panose="02020603050405020304" pitchFamily="18" charset="0"/>
+                <a:cs typeface="Times New Roman" panose="02020603050405020304" pitchFamily="18" charset="0"/>
+              </a:rPr>
               <a:t>Team Name: PQC H-365</a:t>
             </a:r>
           </a:p>
@@ -4353,7 +4816,7 @@
         </p:nvSpPr>
         <p:spPr>
           <a:xfrm>
-            <a:off x="1072498" y="4705599"/>
+            <a:off x="7376792" y="4399257"/>
             <a:ext cx="3711416" cy="1200200"/>
           </a:xfrm>
           <a:prstGeom prst="rect">
@@ -4366,8 +4829,34 @@
           </a:bodyPr>
           <a:lstStyle/>
           <a:p>
-            <a:r>
-              <a:t>Team Lead: Cosmas Chipasha</a:t>
+            <a:pPr algn="l">
+              <a:lnSpc>
+                <a:spcPts val="5039"/>
+              </a:lnSpc>
+              <a:defRPr sz="2400">
+                <a:latin typeface="IBM Plex Sans"/>
+              </a:defRPr>
+            </a:pPr>
+            <a:r>
+              <a:rPr b="1" dirty="0">
+                <a:latin typeface="Times New Roman" panose="02020603050405020304" pitchFamily="18" charset="0"/>
+                <a:cs typeface="Times New Roman" panose="02020603050405020304" pitchFamily="18" charset="0"/>
+              </a:rPr>
+              <a:t>Tea</a:t>
+            </a:r>
+            <a:r>
+              <a:rPr lang="en-US" b="1" dirty="0">
+                <a:latin typeface="Times New Roman" panose="02020603050405020304" pitchFamily="18" charset="0"/>
+                <a:cs typeface="Times New Roman" panose="02020603050405020304" pitchFamily="18" charset="0"/>
+              </a:rPr>
+              <a:t>m</a:t>
+            </a:r>
+            <a:r>
+              <a:rPr b="1" dirty="0">
+                <a:latin typeface="Times New Roman" panose="02020603050405020304" pitchFamily="18" charset="0"/>
+                <a:cs typeface="Times New Roman" panose="02020603050405020304" pitchFamily="18" charset="0"/>
+              </a:rPr>
+              <a:t> Lead Name: Cosmas Chipasha</a:t>
             </a:r>
           </a:p>
         </p:txBody>
@@ -4380,7 +4869,7 @@
         </p:nvSpPr>
         <p:spPr>
           <a:xfrm>
-            <a:off x="771877" y="6085524"/>
+            <a:off x="7344135" y="6127745"/>
             <a:ext cx="5123830" cy="1181029"/>
           </a:xfrm>
           <a:prstGeom prst="rect">
@@ -4393,8 +4882,34 @@
           </a:bodyPr>
           <a:lstStyle/>
           <a:p>
-            <a:r>
-              <a:t>Track: Quantum Security &amp; Cryptography</a:t>
+            <a:pPr algn="l">
+              <a:lnSpc>
+                <a:spcPts val="4899"/>
+              </a:lnSpc>
+              <a:defRPr sz="2400" b="1">
+                <a:latin typeface="IBM Plex Sans"/>
+              </a:defRPr>
+            </a:pPr>
+            <a:r>
+              <a:rPr dirty="0">
+                <a:latin typeface="Times New Roman" panose="02020603050405020304" pitchFamily="18" charset="0"/>
+                <a:cs typeface="Times New Roman" panose="02020603050405020304" pitchFamily="18" charset="0"/>
+              </a:rPr>
+              <a:t>Track:</a:t>
+            </a:r>
+            <a:r>
+              <a:rPr lang="en-US" dirty="0">
+                <a:latin typeface="Times New Roman" panose="02020603050405020304" pitchFamily="18" charset="0"/>
+                <a:cs typeface="Times New Roman" panose="02020603050405020304" pitchFamily="18" charset="0"/>
+              </a:rPr>
+              <a:t> k</a:t>
+            </a:r>
+            <a:r>
+              <a:rPr dirty="0">
+                <a:latin typeface="Times New Roman" panose="02020603050405020304" pitchFamily="18" charset="0"/>
+                <a:cs typeface="Times New Roman" panose="02020603050405020304" pitchFamily="18" charset="0"/>
+              </a:rPr>
+              <a:t> Quantum Security &amp; Cryptography</a:t>
             </a:r>
           </a:p>
         </p:txBody>
@@ -4407,29 +4922,140 @@
         </p:nvSpPr>
         <p:spPr>
           <a:xfrm>
-            <a:off x="696040" y="7854939"/>
-            <a:ext cx="5016937" cy="1802673"/>
+            <a:off x="6384748" y="7679506"/>
+            <a:ext cx="5931138" cy="1802673"/>
           </a:xfrm>
           <a:prstGeom prst="rect">
             <a:avLst/>
           </a:prstGeom>
         </p:spPr>
         <p:txBody>
-          <a:bodyPr lIns="0" tIns="0" rIns="0" bIns="0" rtlCol="0" anchor="t">
+          <a:bodyPr wrap="square" lIns="0" tIns="0" rIns="0" bIns="0" rtlCol="0" anchor="t">
             <a:spAutoFit/>
           </a:bodyPr>
           <a:lstStyle/>
           <a:p>
-            <a:r>
-              <a:t>Problem Statement: PQC H-365 — Quantum-Resistant Hybrid VPN</a:t>
-            </a:r>
-          </a:p>
-          <a:p>
-            <a:r>
-              <a:t>&amp; Multi-Message Secure Channel (NIST PQC Standardised)</a:t>
+            <a:pPr algn="l">
+              <a:lnSpc>
+                <a:spcPts val="4899"/>
+              </a:lnSpc>
+              <a:defRPr sz="2200">
+                <a:latin typeface="IBM Plex Sans"/>
+              </a:defRPr>
+            </a:pPr>
+            <a:r>
+              <a:rPr sz="2400" b="1" dirty="0">
+                <a:latin typeface="Times New Roman" panose="02020603050405020304" pitchFamily="18" charset="0"/>
+                <a:cs typeface="Times New Roman" panose="02020603050405020304" pitchFamily="18" charset="0"/>
+              </a:rPr>
+              <a:t>Problem Statement title: PQC H-365: Quantum-Resistant Hybrid VPN &amp; Multi-Message Secure Channel</a:t>
             </a:r>
           </a:p>
         </p:txBody>
+      </p:sp>
+      <p:sp>
+        <p:nvSpPr>
+          <p:cNvPr id="41" name="Freeform 16">
+            <a:extLst>
+              <a:ext uri="{FF2B5EF4-FFF2-40B4-BE49-F238E27FC236}">
+                <a16:creationId xmlns:a16="http://schemas.microsoft.com/office/drawing/2014/main" id="{C0C02B10-6C40-227A-969A-F01C527D4DD3}"/>
+              </a:ext>
+            </a:extLst>
+          </p:cNvPr>
+          <p:cNvSpPr/>
+          <p:nvPr/>
+        </p:nvSpPr>
+        <p:spPr>
+          <a:xfrm>
+            <a:off x="-369893" y="8307821"/>
+            <a:ext cx="5931138" cy="1977046"/>
+          </a:xfrm>
+          <a:custGeom>
+            <a:avLst/>
+            <a:gdLst/>
+            <a:ahLst/>
+            <a:cxnLst/>
+            <a:rect l="l" t="t" r="r" b="b"/>
+            <a:pathLst>
+              <a:path w="5931138" h="1977046">
+                <a:moveTo>
+                  <a:pt x="0" y="0"/>
+                </a:moveTo>
+                <a:lnTo>
+                  <a:pt x="5931138" y="0"/>
+                </a:lnTo>
+                <a:lnTo>
+                  <a:pt x="5931138" y="1977046"/>
+                </a:lnTo>
+                <a:lnTo>
+                  <a:pt x="0" y="1977046"/>
+                </a:lnTo>
+                <a:lnTo>
+                  <a:pt x="0" y="0"/>
+                </a:lnTo>
+                <a:close/>
+              </a:path>
+            </a:pathLst>
+          </a:custGeom>
+          <a:blipFill>
+            <a:blip r:embed="rId4"/>
+            <a:stretch>
+              <a:fillRect/>
+            </a:stretch>
+          </a:blipFill>
+        </p:spPr>
+      </p:sp>
+      <p:sp>
+        <p:nvSpPr>
+          <p:cNvPr id="44" name="Freeform 16">
+            <a:extLst>
+              <a:ext uri="{FF2B5EF4-FFF2-40B4-BE49-F238E27FC236}">
+                <a16:creationId xmlns:a16="http://schemas.microsoft.com/office/drawing/2014/main" id="{736299CA-B89D-E78B-8086-43069A6698BC}"/>
+              </a:ext>
+            </a:extLst>
+          </p:cNvPr>
+          <p:cNvSpPr/>
+          <p:nvPr/>
+        </p:nvSpPr>
+        <p:spPr>
+          <a:xfrm>
+            <a:off x="13003579" y="1735925"/>
+            <a:ext cx="4452192" cy="1957931"/>
+          </a:xfrm>
+          <a:custGeom>
+            <a:avLst/>
+            <a:gdLst/>
+            <a:ahLst/>
+            <a:cxnLst/>
+            <a:rect l="l" t="t" r="r" b="b"/>
+            <a:pathLst>
+              <a:path w="5931138" h="1977046">
+                <a:moveTo>
+                  <a:pt x="0" y="0"/>
+                </a:moveTo>
+                <a:lnTo>
+                  <a:pt x="5931138" y="0"/>
+                </a:lnTo>
+                <a:lnTo>
+                  <a:pt x="5931138" y="1977046"/>
+                </a:lnTo>
+                <a:lnTo>
+                  <a:pt x="0" y="1977046"/>
+                </a:lnTo>
+                <a:lnTo>
+                  <a:pt x="0" y="0"/>
+                </a:lnTo>
+                <a:close/>
+              </a:path>
+            </a:pathLst>
+          </a:custGeom>
+          <a:blipFill>
+            <a:blip r:embed="rId4"/>
+            <a:stretch>
+              <a:fillRect/>
+            </a:stretch>
+          </a:blipFill>
+        </p:spPr>
       </p:sp>
     </p:spTree>
   </p:cSld>
@@ -5126,35 +5752,8 @@
         </p:nvSpPr>
         <p:spPr>
           <a:xfrm>
-            <a:off x="7391149" y="2009332"/>
-            <a:ext cx="3020616" cy="777072"/>
-          </a:xfrm>
-          <a:prstGeom prst="rect">
-            <a:avLst/>
-          </a:prstGeom>
-        </p:spPr>
-        <p:txBody>
-          <a:bodyPr lIns="0" tIns="0" rIns="0" bIns="0" rtlCol="0" anchor="t">
-            <a:spAutoFit/>
-          </a:bodyPr>
-          <a:lstStyle/>
-          <a:p>
-            <a:r>
-              <a:t>REFERENCES &amp; SOURCES</a:t>
-            </a:r>
-          </a:p>
-        </p:txBody>
-      </p:sp>
-      <p:sp>
-        <p:nvSpPr>
-          <p:cNvPr id="25" name="TextBox 25"/>
-          <p:cNvSpPr txBox="1"/>
-          <p:nvPr/>
-        </p:nvSpPr>
-        <p:spPr>
-          <a:xfrm>
-            <a:off x="1810462" y="3757648"/>
-            <a:ext cx="15154395" cy="5360442"/>
+            <a:off x="6012330" y="2060600"/>
+            <a:ext cx="6705852" cy="415370"/>
           </a:xfrm>
           <a:prstGeom prst="rect">
             <a:avLst/>
@@ -5168,7 +5767,51 @@
           <a:p>
             <a:pPr algn="ctr">
               <a:lnSpc>
-                <a:spcPts val="2939"/>
+                <a:spcPts val="3079"/>
+              </a:lnSpc>
+              <a:spcBef>
+                <a:spcPct val="0"/>
+              </a:spcBef>
+            </a:pPr>
+            <a:r>
+              <a:rPr lang="en-US" sz="3600" b="1" dirty="0">
+                <a:solidFill>
+                  <a:srgbClr val="000000"/>
+                </a:solidFill>
+                <a:latin typeface="IBM Plex Sans"/>
+                <a:ea typeface="IBM Plex Sans"/>
+                <a:cs typeface="IBM Plex Sans"/>
+                <a:sym typeface="IBM Plex Sans"/>
+              </a:rPr>
+              <a:t>REFERENCES AND SOURCES</a:t>
+            </a:r>
+          </a:p>
+        </p:txBody>
+      </p:sp>
+      <p:sp>
+        <p:nvSpPr>
+          <p:cNvPr id="25" name="TextBox 25"/>
+          <p:cNvSpPr txBox="1"/>
+          <p:nvPr/>
+        </p:nvSpPr>
+        <p:spPr>
+          <a:xfrm>
+            <a:off x="1577278" y="2931166"/>
+            <a:ext cx="15154395" cy="6950942"/>
+          </a:xfrm>
+          <a:prstGeom prst="rect">
+            <a:avLst/>
+          </a:prstGeom>
+        </p:spPr>
+        <p:txBody>
+          <a:bodyPr wrap="square" lIns="0" tIns="0" rIns="0" bIns="0" rtlCol="0" anchor="t">
+            <a:spAutoFit/>
+          </a:bodyPr>
+          <a:lstStyle/>
+          <a:p>
+            <a:pPr>
+              <a:lnSpc>
+                <a:spcPct val="150000"/>
               </a:lnSpc>
               <a:spcBef>
                 <a:spcPct val="0"/>
@@ -5184,17 +5827,18 @@
               </a:defRPr>
             </a:pPr>
             <a:r>
-              <a:t>▸ NIST FIPS 203 — ML-KEM (Module-Lattice-Based KEM), Aug 2024</a:t>
-            </a:r>
-          </a:p>
-          <a:p>
-            <a:pPr algn="ctr">
+              <a:rPr sz="2400" dirty="0">
+                <a:latin typeface="Times New Roman" panose="02020603050405020304" pitchFamily="18" charset="0"/>
+                <a:cs typeface="Times New Roman" panose="02020603050405020304" pitchFamily="18" charset="0"/>
+              </a:rPr>
+              <a:t>• NIST FIPS 203: Module-Lattice-Based Key-Encapsulation Mechanism Standard (ML-KEM), National Institute of Standards and Technology, 2024.</a:t>
+            </a:r>
+          </a:p>
+          <a:p>
+            <a:pPr>
               <a:lnSpc>
-                <a:spcPts val="2939"/>
+                <a:spcPct val="150000"/>
               </a:lnSpc>
-              <a:spcBef>
-                <a:spcPct val="0"/>
-              </a:spcBef>
               <a:spcAft>
                 <a:spcPts val="1200"/>
               </a:spcAft>
@@ -5206,17 +5850,18 @@
               </a:defRPr>
             </a:pPr>
             <a:r>
-              <a:t>   doi.org/10.6028/NIST.FIPS.203</a:t>
-            </a:r>
-          </a:p>
-          <a:p>
-            <a:pPr algn="ctr">
+              <a:rPr sz="2400" dirty="0">
+                <a:latin typeface="Times New Roman" panose="02020603050405020304" pitchFamily="18" charset="0"/>
+                <a:cs typeface="Times New Roman" panose="02020603050405020304" pitchFamily="18" charset="0"/>
+              </a:rPr>
+              <a:t>• NIST FIPS 204: Module-Lattice-Based Digital Signature Standard (ML-DSA), National Institute of Standards and Technology, 2024.</a:t>
+            </a:r>
+          </a:p>
+          <a:p>
+            <a:pPr>
               <a:lnSpc>
-                <a:spcPts val="2939"/>
+                <a:spcPct val="150000"/>
               </a:lnSpc>
-              <a:spcBef>
-                <a:spcPct val="0"/>
-              </a:spcBef>
               <a:spcAft>
                 <a:spcPts val="1200"/>
               </a:spcAft>
@@ -5228,17 +5873,18 @@
               </a:defRPr>
             </a:pPr>
             <a:r>
-              <a:t/>
-            </a:r>
-          </a:p>
-          <a:p>
-            <a:pPr algn="ctr">
+              <a:rPr sz="2400" dirty="0">
+                <a:latin typeface="Times New Roman" panose="02020603050405020304" pitchFamily="18" charset="0"/>
+                <a:cs typeface="Times New Roman" panose="02020603050405020304" pitchFamily="18" charset="0"/>
+              </a:rPr>
+              <a:t>• RFC 5869: HMAC-based Extract-and-Expand Key Derivation Function (HKDF), Internet Engineering Task Force.</a:t>
+            </a:r>
+          </a:p>
+          <a:p>
+            <a:pPr>
               <a:lnSpc>
-                <a:spcPts val="2939"/>
+                <a:spcPct val="150000"/>
               </a:lnSpc>
-              <a:spcBef>
-                <a:spcPct val="0"/>
-              </a:spcBef>
               <a:spcAft>
                 <a:spcPts val="1200"/>
               </a:spcAft>
@@ -5250,17 +5896,18 @@
               </a:defRPr>
             </a:pPr>
             <a:r>
-              <a:t>▸ NIST FIPS 204 — ML-DSA (Module-Lattice-Based DSA), Aug 2024</a:t>
-            </a:r>
-          </a:p>
-          <a:p>
-            <a:pPr algn="ctr">
+              <a:rPr sz="2400" dirty="0">
+                <a:latin typeface="Times New Roman" panose="02020603050405020304" pitchFamily="18" charset="0"/>
+                <a:cs typeface="Times New Roman" panose="02020603050405020304" pitchFamily="18" charset="0"/>
+              </a:rPr>
+              <a:t>• RFC 7748: Elliptic Curves for Security (X25519 &amp; X448), Internet Engineering Task Force.</a:t>
+            </a:r>
+          </a:p>
+          <a:p>
+            <a:pPr>
               <a:lnSpc>
-                <a:spcPts val="2939"/>
+                <a:spcPct val="150000"/>
               </a:lnSpc>
-              <a:spcBef>
-                <a:spcPct val="0"/>
-              </a:spcBef>
               <a:spcAft>
                 <a:spcPts val="1200"/>
               </a:spcAft>
@@ -5272,17 +5919,18 @@
               </a:defRPr>
             </a:pPr>
             <a:r>
-              <a:t>   doi.org/10.6028/NIST.FIPS.204</a:t>
-            </a:r>
-          </a:p>
-          <a:p>
-            <a:pPr algn="ctr">
+              <a:rPr sz="2400" dirty="0">
+                <a:latin typeface="Times New Roman" panose="02020603050405020304" pitchFamily="18" charset="0"/>
+                <a:cs typeface="Times New Roman" panose="02020603050405020304" pitchFamily="18" charset="0"/>
+              </a:rPr>
+              <a:t>• NIST SP 800-38D: Recommendation for Block Cipher Modes of Operation: Galois/Counter Mode (GCM).</a:t>
+            </a:r>
+          </a:p>
+          <a:p>
+            <a:pPr>
               <a:lnSpc>
-                <a:spcPts val="2939"/>
+                <a:spcPct val="150000"/>
               </a:lnSpc>
-              <a:spcBef>
-                <a:spcPct val="0"/>
-              </a:spcBef>
               <a:spcAft>
                 <a:spcPts val="1200"/>
               </a:spcAft>
@@ -5294,17 +5942,18 @@
               </a:defRPr>
             </a:pPr>
             <a:r>
-              <a:t/>
-            </a:r>
-          </a:p>
-          <a:p>
-            <a:pPr algn="ctr">
+              <a:rPr sz="2400" dirty="0">
+                <a:latin typeface="Times New Roman" panose="02020603050405020304" pitchFamily="18" charset="0"/>
+                <a:cs typeface="Times New Roman" panose="02020603050405020304" pitchFamily="18" charset="0"/>
+              </a:rPr>
+              <a:t>• Open Quantum Safe (OQS): liboqs C library for quantum-resistant cryptographic algorithms (https://github.com/open-quantum-safe/liboqs).</a:t>
+            </a:r>
+          </a:p>
+          <a:p>
+            <a:pPr>
               <a:lnSpc>
-                <a:spcPts val="2939"/>
+                <a:spcPct val="150000"/>
               </a:lnSpc>
-              <a:spcBef>
-                <a:spcPct val="0"/>
-              </a:spcBef>
               <a:spcAft>
                 <a:spcPts val="1200"/>
               </a:spcAft>
@@ -5316,293 +5965,11 @@
               </a:defRPr>
             </a:pPr>
             <a:r>
-              <a:t>▸ NIST FIPS 205 — SLH-DSA (Stateless Hash-Based DSA), Aug 2024</a:t>
-            </a:r>
-          </a:p>
-          <a:p>
-            <a:pPr algn="ctr">
-              <a:lnSpc>
-                <a:spcPts val="2939"/>
-              </a:lnSpc>
-              <a:spcBef>
-                <a:spcPct val="0"/>
-              </a:spcBef>
-              <a:spcAft>
-                <a:spcPts val="1200"/>
-              </a:spcAft>
-              <a:defRPr sz="1800">
-                <a:solidFill>
-                  <a:srgbClr val="1E293B"/>
-                </a:solidFill>
-                <a:latin typeface="IBM Plex Sans"/>
-              </a:defRPr>
-            </a:pPr>
-            <a:r>
-              <a:t>   doi.org/10.6028/NIST.FIPS.205</a:t>
-            </a:r>
-          </a:p>
-          <a:p>
-            <a:pPr algn="ctr">
-              <a:lnSpc>
-                <a:spcPts val="2939"/>
-              </a:lnSpc>
-              <a:spcBef>
-                <a:spcPct val="0"/>
-              </a:spcBef>
-              <a:spcAft>
-                <a:spcPts val="1200"/>
-              </a:spcAft>
-              <a:defRPr sz="1800">
-                <a:solidFill>
-                  <a:srgbClr val="1E293B"/>
-                </a:solidFill>
-                <a:latin typeface="IBM Plex Sans"/>
-              </a:defRPr>
-            </a:pPr>
-            <a:r>
-              <a:t/>
-            </a:r>
-          </a:p>
-          <a:p>
-            <a:pPr algn="ctr">
-              <a:lnSpc>
-                <a:spcPts val="2939"/>
-              </a:lnSpc>
-              <a:spcBef>
-                <a:spcPct val="0"/>
-              </a:spcBef>
-              <a:spcAft>
-                <a:spcPts val="1200"/>
-              </a:spcAft>
-              <a:defRPr sz="1800">
-                <a:solidFill>
-                  <a:srgbClr val="1E293B"/>
-                </a:solidFill>
-                <a:latin typeface="IBM Plex Sans"/>
-              </a:defRPr>
-            </a:pPr>
-            <a:r>
-              <a:t>▸ Open Quantum Safe (liboqs v0.10.0)</a:t>
-            </a:r>
-          </a:p>
-          <a:p>
-            <a:pPr algn="ctr">
-              <a:lnSpc>
-                <a:spcPts val="2939"/>
-              </a:lnSpc>
-              <a:spcBef>
-                <a:spcPct val="0"/>
-              </a:spcBef>
-              <a:spcAft>
-                <a:spcPts val="1200"/>
-              </a:spcAft>
-              <a:defRPr sz="1800">
-                <a:solidFill>
-                  <a:srgbClr val="1E293B"/>
-                </a:solidFill>
-                <a:latin typeface="IBM Plex Sans"/>
-              </a:defRPr>
-            </a:pPr>
-            <a:r>
-              <a:t>   openquantumsafe.org | github.com/open-quantum-safe/liboqs</a:t>
-            </a:r>
-          </a:p>
-          <a:p>
-            <a:pPr algn="ctr">
-              <a:lnSpc>
-                <a:spcPts val="2939"/>
-              </a:lnSpc>
-              <a:spcBef>
-                <a:spcPct val="0"/>
-              </a:spcBef>
-              <a:spcAft>
-                <a:spcPts val="1200"/>
-              </a:spcAft>
-              <a:defRPr sz="1800">
-                <a:solidFill>
-                  <a:srgbClr val="1E293B"/>
-                </a:solidFill>
-                <a:latin typeface="IBM Plex Sans"/>
-              </a:defRPr>
-            </a:pPr>
-            <a:r>
-              <a:t/>
-            </a:r>
-          </a:p>
-          <a:p>
-            <a:pPr algn="ctr">
-              <a:lnSpc>
-                <a:spcPts val="2939"/>
-              </a:lnSpc>
-              <a:spcBef>
-                <a:spcPct val="0"/>
-              </a:spcBef>
-              <a:spcAft>
-                <a:spcPts val="1200"/>
-              </a:spcAft>
-              <a:defRPr sz="1800">
-                <a:solidFill>
-                  <a:srgbClr val="1E293B"/>
-                </a:solidFill>
-                <a:latin typeface="IBM Plex Sans"/>
-              </a:defRPr>
-            </a:pPr>
-            <a:r>
-              <a:t>▸ NSA CNSA 2.0 Suite — Commercial National Security Algorithm Suite 2.0</a:t>
-            </a:r>
-          </a:p>
-          <a:p>
-            <a:pPr algn="ctr">
-              <a:lnSpc>
-                <a:spcPts val="2939"/>
-              </a:lnSpc>
-              <a:spcBef>
-                <a:spcPct val="0"/>
-              </a:spcBef>
-              <a:spcAft>
-                <a:spcPts val="1200"/>
-              </a:spcAft>
-              <a:defRPr sz="1800">
-                <a:solidFill>
-                  <a:srgbClr val="1E293B"/>
-                </a:solidFill>
-                <a:latin typeface="IBM Plex Sans"/>
-              </a:defRPr>
-            </a:pPr>
-            <a:r>
-              <a:t>   media.defense.gov/2022/Sep/07/2003071834/-1/-1/0/CSA_CNSA_2.0_ALGORITHMS_</a:t>
-            </a:r>
-          </a:p>
-          <a:p>
-            <a:pPr algn="ctr">
-              <a:lnSpc>
-                <a:spcPts val="2939"/>
-              </a:lnSpc>
-              <a:spcBef>
-                <a:spcPct val="0"/>
-              </a:spcBef>
-              <a:spcAft>
-                <a:spcPts val="1200"/>
-              </a:spcAft>
-              <a:defRPr sz="1800">
-                <a:solidFill>
-                  <a:srgbClr val="1E293B"/>
-                </a:solidFill>
-                <a:latin typeface="IBM Plex Sans"/>
-              </a:defRPr>
-            </a:pPr>
-            <a:r>
-              <a:t/>
-            </a:r>
-          </a:p>
-          <a:p>
-            <a:pPr algn="ctr">
-              <a:lnSpc>
-                <a:spcPts val="2939"/>
-              </a:lnSpc>
-              <a:spcBef>
-                <a:spcPct val="0"/>
-              </a:spcBef>
-              <a:spcAft>
-                <a:spcPts val="1200"/>
-              </a:spcAft>
-              <a:defRPr sz="1800">
-                <a:solidFill>
-                  <a:srgbClr val="1E293B"/>
-                </a:solidFill>
-                <a:latin typeface="IBM Plex Sans"/>
-              </a:defRPr>
-            </a:pPr>
-            <a:r>
-              <a:t>▸ Shor, P.W. (1994) — Polynomial-Time Algorithms for Prime Factorization</a:t>
-            </a:r>
-          </a:p>
-          <a:p>
-            <a:pPr algn="ctr">
-              <a:lnSpc>
-                <a:spcPts val="2939"/>
-              </a:lnSpc>
-              <a:spcBef>
-                <a:spcPct val="0"/>
-              </a:spcBef>
-              <a:spcAft>
-                <a:spcPts val="1200"/>
-              </a:spcAft>
-              <a:defRPr sz="1800">
-                <a:solidFill>
-                  <a:srgbClr val="1E293B"/>
-                </a:solidFill>
-                <a:latin typeface="IBM Plex Sans"/>
-              </a:defRPr>
-            </a:pPr>
-            <a:r>
-              <a:t>   Proceedings of the 35th Annual Symposium on FOCS, IEEE.</a:t>
-            </a:r>
-          </a:p>
-          <a:p>
-            <a:pPr algn="ctr">
-              <a:lnSpc>
-                <a:spcPts val="2939"/>
-              </a:lnSpc>
-              <a:spcBef>
-                <a:spcPct val="0"/>
-              </a:spcBef>
-              <a:spcAft>
-                <a:spcPts val="1200"/>
-              </a:spcAft>
-              <a:defRPr sz="1800">
-                <a:solidFill>
-                  <a:srgbClr val="1E293B"/>
-                </a:solidFill>
-                <a:latin typeface="IBM Plex Sans"/>
-              </a:defRPr>
-            </a:pPr>
-            <a:r>
-              <a:t/>
-            </a:r>
-          </a:p>
-          <a:p>
-            <a:pPr algn="ctr">
-              <a:lnSpc>
-                <a:spcPts val="2939"/>
-              </a:lnSpc>
-              <a:spcBef>
-                <a:spcPct val="0"/>
-              </a:spcBef>
-              <a:spcAft>
-                <a:spcPts val="1200"/>
-              </a:spcAft>
-              <a:defRPr sz="1800">
-                <a:solidFill>
-                  <a:srgbClr val="1E293B"/>
-                </a:solidFill>
-                <a:latin typeface="IBM Plex Sans"/>
-              </a:defRPr>
-            </a:pPr>
-            <a:r>
-              <a:t>▸ Project Repository</a:t>
-            </a:r>
-          </a:p>
-          <a:p>
-            <a:pPr algn="ctr">
-              <a:lnSpc>
-                <a:spcPts val="2939"/>
-              </a:lnSpc>
-              <a:spcBef>
-                <a:spcPct val="0"/>
-              </a:spcBef>
-              <a:spcAft>
-                <a:spcPts val="1200"/>
-              </a:spcAft>
-              <a:defRPr sz="1800">
-                <a:solidFill>
-                  <a:srgbClr val="1E293B"/>
-                </a:solidFill>
-                <a:latin typeface="IBM Plex Sans"/>
-              </a:defRPr>
-            </a:pPr>
-            <a:r>
-              <a:t>   github.com/chipashacosmas/PQC-H365 (Apache 2.0 License)</a:t>
+              <a:rPr sz="2400" dirty="0">
+                <a:latin typeface="Times New Roman" panose="02020603050405020304" pitchFamily="18" charset="0"/>
+                <a:cs typeface="Times New Roman" panose="02020603050405020304" pitchFamily="18" charset="0"/>
+              </a:rPr>
+              <a:t>• Original Team Repository: PQC H-365 implementation, benchmarks, and documentation (https://github.com/chipashacosmas/PQC-H365).</a:t>
             </a:r>
           </a:p>
         </p:txBody>
@@ -6287,8 +6654,8 @@
         </p:nvSpPr>
         <p:spPr>
           <a:xfrm>
-            <a:off x="7327482" y="1887412"/>
-            <a:ext cx="3950117" cy="1065869"/>
+            <a:off x="4920343" y="1891789"/>
+            <a:ext cx="6040141" cy="551433"/>
           </a:xfrm>
           <a:prstGeom prst="rect">
             <a:avLst/>
@@ -6300,7 +6667,24 @@
           </a:bodyPr>
           <a:lstStyle/>
           <a:p>
-            <a:r>
+            <a:pPr algn="ctr">
+              <a:lnSpc>
+                <a:spcPts val="4339"/>
+              </a:lnSpc>
+              <a:spcBef>
+                <a:spcPct val="0"/>
+              </a:spcBef>
+            </a:pPr>
+            <a:r>
+              <a:rPr lang="en-US" sz="4000" b="1" dirty="0">
+                <a:solidFill>
+                  <a:srgbClr val="000000"/>
+                </a:solidFill>
+                <a:latin typeface="Times New Roman" panose="02020603050405020304" pitchFamily="18" charset="0"/>
+                <a:ea typeface="IBM Plex Sans"/>
+                <a:cs typeface="Times New Roman" panose="02020603050405020304" pitchFamily="18" charset="0"/>
+                <a:sym typeface="IBM Plex Sans"/>
+              </a:rPr>
               <a:t>PROBLEM STATEMENT</a:t>
             </a:r>
           </a:p>
@@ -6315,7 +6699,7 @@
         <p:spPr>
           <a:xfrm>
             <a:off x="2667000" y="2933700"/>
-            <a:ext cx="11915609" cy="4547399"/>
+            <a:ext cx="12573000" cy="5406608"/>
           </a:xfrm>
           <a:prstGeom prst="rect">
             <a:avLst/>
@@ -6342,8 +6726,30 @@
               </a:defRPr>
             </a:pPr>
             <a:r>
-              <a:t>▸ The Quantum Threat Is Real &amp; Imminent</a:t>
-            </a:r>
+              <a:rPr sz="2400" dirty="0">
+                <a:latin typeface="Times New Roman" panose="02020603050405020304" pitchFamily="18" charset="0"/>
+                <a:cs typeface="Times New Roman" panose="02020603050405020304" pitchFamily="18" charset="0"/>
+              </a:rPr>
+              <a:t>• Shor's Algorithm on a Cryptanalytically Relevant Quantum Computer (CRQC) breaks all classical public</a:t>
+            </a:r>
+            <a:r>
+              <a:rPr lang="en-US" sz="2400" dirty="0">
+                <a:latin typeface="Times New Roman" panose="02020603050405020304" pitchFamily="18" charset="0"/>
+                <a:cs typeface="Times New Roman" panose="02020603050405020304" pitchFamily="18" charset="0"/>
+              </a:rPr>
+              <a:t> </a:t>
+            </a:r>
+            <a:r>
+              <a:rPr sz="2400" dirty="0">
+                <a:latin typeface="Times New Roman" panose="02020603050405020304" pitchFamily="18" charset="0"/>
+                <a:cs typeface="Times New Roman" panose="02020603050405020304" pitchFamily="18" charset="0"/>
+              </a:rPr>
+              <a:t>key algorithms based on discrete logarithms and integer factorization (RSA-2048, Diffie-Hellman, ECDH/X25519).</a:t>
+            </a:r>
+            <a:endParaRPr lang="en-US" sz="2400" dirty="0">
+              <a:latin typeface="Times New Roman" panose="02020603050405020304" pitchFamily="18" charset="0"/>
+              <a:cs typeface="Times New Roman" panose="02020603050405020304" pitchFamily="18" charset="0"/>
+            </a:endParaRPr>
           </a:p>
           <a:p>
             <a:pPr>
@@ -6360,15 +6766,13 @@
                 <a:latin typeface="IBM Plex Sans"/>
               </a:defRPr>
             </a:pPr>
-            <a:r>
-              <a:t>   Shor's Algorithm on a Cryptanalytically Relevant Quantum Computer (CRQC) breaks all classical public-key algorithms based on discrete logarithms and integer factorisation (RSA, ECC, X25519, DH). IBM projects &gt;100k-qubit systems by 2033.</a:t>
-            </a:r>
+            <a:endParaRPr sz="2400" dirty="0">
+              <a:latin typeface="Times New Roman" panose="02020603050405020304" pitchFamily="18" charset="0"/>
+              <a:cs typeface="Times New Roman" panose="02020603050405020304" pitchFamily="18" charset="0"/>
+            </a:endParaRPr>
           </a:p>
           <a:p>
             <a:pPr>
-              <a:lnSpc>
-                <a:spcPts val="4339"/>
-              </a:lnSpc>
               <a:spcAft>
                 <a:spcPts val="1200"/>
               </a:spcAft>
@@ -6380,14 +6784,33 @@
               </a:defRPr>
             </a:pPr>
             <a:r>
-              <a:t/>
-            </a:r>
+              <a:rPr sz="2400" dirty="0">
+                <a:latin typeface="Times New Roman" panose="02020603050405020304" pitchFamily="18" charset="0"/>
+                <a:cs typeface="Times New Roman" panose="02020603050405020304" pitchFamily="18" charset="0"/>
+              </a:rPr>
+              <a:t>• </a:t>
+            </a:r>
+            <a:r>
+              <a:rPr sz="2400" b="1" dirty="0">
+                <a:latin typeface="Times New Roman" panose="02020603050405020304" pitchFamily="18" charset="0"/>
+                <a:cs typeface="Times New Roman" panose="02020603050405020304" pitchFamily="18" charset="0"/>
+              </a:rPr>
+              <a:t>Harvest Now, Decrypt Later (HNDL</a:t>
+            </a:r>
+            <a:r>
+              <a:rPr sz="2400" dirty="0">
+                <a:latin typeface="Times New Roman" panose="02020603050405020304" pitchFamily="18" charset="0"/>
+                <a:cs typeface="Times New Roman" panose="02020603050405020304" pitchFamily="18" charset="0"/>
+              </a:rPr>
+              <a:t>): Hostile adversaries and nation-states are actively recording and storing enterprise and defense encrypted network traffic today to decrypt retrospectively once quantum computers arrive.</a:t>
+            </a:r>
+            <a:endParaRPr lang="en-US" sz="2400" dirty="0">
+              <a:latin typeface="Times New Roman" panose="02020603050405020304" pitchFamily="18" charset="0"/>
+              <a:cs typeface="Times New Roman" panose="02020603050405020304" pitchFamily="18" charset="0"/>
+            </a:endParaRPr>
           </a:p>
           <a:p>
             <a:pPr>
-              <a:lnSpc>
-                <a:spcPts val="4339"/>
-              </a:lnSpc>
               <a:spcAft>
                 <a:spcPts val="1200"/>
               </a:spcAft>
@@ -6398,15 +6821,13 @@
                 <a:latin typeface="IBM Plex Sans"/>
               </a:defRPr>
             </a:pPr>
-            <a:r>
-              <a:t>▸ 'Harvest Now, Decrypt Later' Attacks Active Today</a:t>
-            </a:r>
+            <a:endParaRPr sz="2400" dirty="0">
+              <a:latin typeface="Times New Roman" panose="02020603050405020304" pitchFamily="18" charset="0"/>
+              <a:cs typeface="Times New Roman" panose="02020603050405020304" pitchFamily="18" charset="0"/>
+            </a:endParaRPr>
           </a:p>
           <a:p>
             <a:pPr>
-              <a:lnSpc>
-                <a:spcPts val="4339"/>
-              </a:lnSpc>
               <a:spcAft>
                 <a:spcPts val="1200"/>
               </a:spcAft>
@@ -6418,64 +6839,39 @@
               </a:defRPr>
             </a:pPr>
             <a:r>
-              <a:t>   Nation-state actors are already intercepting and archiving today's encrypted traffic for future decryption. Data with a 10+ year sensitivity window is compromised NOW — before the CRQC even exists.</a:t>
-            </a:r>
-          </a:p>
-          <a:p>
-            <a:pPr>
-              <a:lnSpc>
-                <a:spcPts val="4339"/>
-              </a:lnSpc>
-              <a:spcAft>
-                <a:spcPts val="1200"/>
-              </a:spcAft>
-              <a:defRPr sz="2000">
-                <a:solidFill>
-                  <a:srgbClr val="1E293B"/>
-                </a:solidFill>
-                <a:latin typeface="IBM Plex Sans"/>
-              </a:defRPr>
-            </a:pPr>
-            <a:r>
-              <a:t/>
-            </a:r>
-          </a:p>
-          <a:p>
-            <a:pPr>
-              <a:lnSpc>
-                <a:spcPts val="4339"/>
-              </a:lnSpc>
-              <a:spcAft>
-                <a:spcPts val="1200"/>
-              </a:spcAft>
-              <a:defRPr sz="2000">
-                <a:solidFill>
-                  <a:srgbClr val="1E293B"/>
-                </a:solidFill>
-                <a:latin typeface="IBM Plex Sans"/>
-              </a:defRPr>
-            </a:pPr>
-            <a:r>
-              <a:t>▸ Legacy VPN &amp; TLS Are Structurally Vulnerable</a:t>
-            </a:r>
-          </a:p>
-          <a:p>
-            <a:pPr>
-              <a:lnSpc>
-                <a:spcPts val="4339"/>
-              </a:lnSpc>
-              <a:spcAft>
-                <a:spcPts val="1200"/>
-              </a:spcAft>
-              <a:defRPr sz="2000">
-                <a:solidFill>
-                  <a:srgbClr val="1E293B"/>
-                </a:solidFill>
-                <a:latin typeface="IBM Plex Sans"/>
-              </a:defRPr>
-            </a:pPr>
-            <a:r>
-              <a:t>   OpenVPN, WireGuard, and TLS 1.3 all rely on ECDHE/X25519. A single CRQC retroactively breaks every past session. There is no patch — a new cryptographic foundation is required.</a:t>
+              <a:rPr sz="2400" dirty="0">
+                <a:latin typeface="Times New Roman" panose="02020603050405020304" pitchFamily="18" charset="0"/>
+                <a:cs typeface="Times New Roman" panose="02020603050405020304" pitchFamily="18" charset="0"/>
+              </a:rPr>
+              <a:t>• </a:t>
+            </a:r>
+            <a:r>
+              <a:rPr sz="2400" b="1" dirty="0">
+                <a:latin typeface="Times New Roman" panose="02020603050405020304" pitchFamily="18" charset="0"/>
+                <a:cs typeface="Times New Roman" panose="02020603050405020304" pitchFamily="18" charset="0"/>
+              </a:rPr>
+              <a:t>The PQC Performance Bottleneck</a:t>
+            </a:r>
+            <a:r>
+              <a:rPr sz="2400" dirty="0">
+                <a:latin typeface="Times New Roman" panose="02020603050405020304" pitchFamily="18" charset="0"/>
+                <a:cs typeface="Times New Roman" panose="02020603050405020304" pitchFamily="18" charset="0"/>
+              </a:rPr>
+              <a:t>: Post-quantum keys and signatures are kilobyte-scale (1KB–3KB vs 32B). Naive serial hybrid implementations cause severe latency spikes (50+ </a:t>
+            </a:r>
+            <a:r>
+              <a:rPr sz="2400" dirty="0" err="1">
+                <a:latin typeface="Times New Roman" panose="02020603050405020304" pitchFamily="18" charset="0"/>
+                <a:cs typeface="Times New Roman" panose="02020603050405020304" pitchFamily="18" charset="0"/>
+              </a:rPr>
+              <a:t>ms</a:t>
+            </a:r>
+            <a:r>
+              <a:rPr sz="2400" dirty="0">
+                <a:latin typeface="Times New Roman" panose="02020603050405020304" pitchFamily="18" charset="0"/>
+                <a:cs typeface="Times New Roman" panose="02020603050405020304" pitchFamily="18" charset="0"/>
+              </a:rPr>
+              <a:t>) and network packet fragmentation, making real-time VPN tunnels unusable.</a:t>
             </a:r>
           </a:p>
         </p:txBody>
@@ -7132,8 +7528,8 @@
         </p:nvSpPr>
         <p:spPr>
           <a:xfrm>
-            <a:off x="7514703" y="1943288"/>
-            <a:ext cx="2625805" cy="453329"/>
+            <a:off x="6248400" y="1923006"/>
+            <a:ext cx="5367990" cy="487313"/>
           </a:xfrm>
           <a:prstGeom prst="rect">
             <a:avLst/>
@@ -7145,7 +7541,24 @@
           </a:bodyPr>
           <a:lstStyle/>
           <a:p>
-            <a:r>
+            <a:pPr algn="ctr">
+              <a:lnSpc>
+                <a:spcPts val="3779"/>
+              </a:lnSpc>
+              <a:spcBef>
+                <a:spcPct val="0"/>
+              </a:spcBef>
+            </a:pPr>
+            <a:r>
+              <a:rPr lang="en-US" sz="4000" b="1" dirty="0">
+                <a:solidFill>
+                  <a:srgbClr val="000000"/>
+                </a:solidFill>
+                <a:latin typeface="Times New Roman" panose="02020603050405020304" pitchFamily="18" charset="0"/>
+                <a:ea typeface="IBM Plex Sans"/>
+                <a:cs typeface="Times New Roman" panose="02020603050405020304" pitchFamily="18" charset="0"/>
+                <a:sym typeface="IBM Plex Sans"/>
+              </a:rPr>
               <a:t>WHY IT MATTERS</a:t>
             </a:r>
           </a:p>
@@ -7159,8 +7572,8 @@
         </p:nvSpPr>
         <p:spPr>
           <a:xfrm>
-            <a:off x="3356548" y="3740411"/>
-            <a:ext cx="11502452" cy="5401479"/>
+            <a:off x="3650478" y="2999239"/>
+            <a:ext cx="11502452" cy="6447919"/>
           </a:xfrm>
           <a:prstGeom prst="rect">
             <a:avLst/>
@@ -7172,7 +7585,7 @@
           </a:bodyPr>
           <a:lstStyle/>
           <a:p>
-            <a:pPr algn="ctr">
+            <a:pPr>
               <a:lnSpc>
                 <a:spcPts val="4199"/>
               </a:lnSpc>
@@ -7190,17 +7603,29 @@
               </a:defRPr>
             </a:pPr>
             <a:r>
-              <a:t>▸ Who Faces This Problem</a:t>
-            </a:r>
-          </a:p>
-          <a:p>
-            <a:pPr algn="ctr">
-              <a:lnSpc>
-                <a:spcPts val="4199"/>
-              </a:lnSpc>
-              <a:spcBef>
-                <a:spcPct val="0"/>
-              </a:spcBef>
+              <a:rPr sz="2400" dirty="0">
+                <a:latin typeface="Times New Roman" panose="02020603050405020304" pitchFamily="18" charset="0"/>
+                <a:cs typeface="Times New Roman" panose="02020603050405020304" pitchFamily="18" charset="0"/>
+              </a:rPr>
+              <a:t>• </a:t>
+            </a:r>
+            <a:r>
+              <a:rPr sz="2400" b="1" dirty="0">
+                <a:latin typeface="Times New Roman" panose="02020603050405020304" pitchFamily="18" charset="0"/>
+                <a:cs typeface="Times New Roman" panose="02020603050405020304" pitchFamily="18" charset="0"/>
+              </a:rPr>
+              <a:t>Who Faces This Problem: </a:t>
+            </a:r>
+            <a:r>
+              <a:rPr sz="2400" dirty="0">
+                <a:latin typeface="Times New Roman" panose="02020603050405020304" pitchFamily="18" charset="0"/>
+                <a:cs typeface="Times New Roman" panose="02020603050405020304" pitchFamily="18" charset="0"/>
+              </a:rPr>
+              <a:t>Defense networks, government agencies, global financial institutions (SWIFT/inter-bank), enterprise remote workforces, and critical cloud infrastructure.</a:t>
+            </a:r>
+          </a:p>
+          <a:p>
+            <a:pPr>
               <a:spcAft>
                 <a:spcPts val="1200"/>
               </a:spcAft>
@@ -7212,17 +7637,26 @@
               </a:defRPr>
             </a:pPr>
             <a:r>
-              <a:t>   Defense networks, government agencies, global financial institutions (SWIFT/inter-bank), enterprise remote workforces, and critical infrastructure (power grids, hospitals, telecoms) — all rely on VPN tunnels that are quantum-vulnerable today.</a:t>
-            </a:r>
-          </a:p>
-          <a:p>
-            <a:pPr algn="ctr">
-              <a:lnSpc>
-                <a:spcPts val="4199"/>
-              </a:lnSpc>
-              <a:spcBef>
-                <a:spcPct val="0"/>
-              </a:spcBef>
+              <a:rPr sz="2400" b="1" dirty="0">
+                <a:latin typeface="Times New Roman" panose="02020603050405020304" pitchFamily="18" charset="0"/>
+                <a:cs typeface="Times New Roman" panose="02020603050405020304" pitchFamily="18" charset="0"/>
+              </a:rPr>
+              <a:t>• Permanent Data Compromise: </a:t>
+            </a:r>
+            <a:r>
+              <a:rPr sz="2400" dirty="0">
+                <a:latin typeface="Times New Roman" panose="02020603050405020304" pitchFamily="18" charset="0"/>
+                <a:cs typeface="Times New Roman" panose="02020603050405020304" pitchFamily="18" charset="0"/>
+              </a:rPr>
+              <a:t>Intellectual property, military secrets, and long-term financial/medical records require 20–30 years of confidentiality. If harvested today, their secrecy is permanently broken under HNDL.</a:t>
+            </a:r>
+            <a:endParaRPr lang="en-US" sz="2400" dirty="0">
+              <a:latin typeface="Times New Roman" panose="02020603050405020304" pitchFamily="18" charset="0"/>
+              <a:cs typeface="Times New Roman" panose="02020603050405020304" pitchFamily="18" charset="0"/>
+            </a:endParaRPr>
+          </a:p>
+          <a:p>
+            <a:pPr>
               <a:spcAft>
                 <a:spcPts val="1200"/>
               </a:spcAft>
@@ -7233,18 +7667,13 @@
                 <a:latin typeface="IBM Plex Sans"/>
               </a:defRPr>
             </a:pPr>
-            <a:r>
-              <a:t/>
-            </a:r>
-          </a:p>
-          <a:p>
-            <a:pPr algn="ctr">
-              <a:lnSpc>
-                <a:spcPts val="4199"/>
-              </a:lnSpc>
-              <a:spcBef>
-                <a:spcPct val="0"/>
-              </a:spcBef>
+            <a:endParaRPr sz="2400" dirty="0">
+              <a:latin typeface="Times New Roman" panose="02020603050405020304" pitchFamily="18" charset="0"/>
+              <a:cs typeface="Times New Roman" panose="02020603050405020304" pitchFamily="18" charset="0"/>
+            </a:endParaRPr>
+          </a:p>
+          <a:p>
+            <a:pPr>
               <a:spcAft>
                 <a:spcPts val="1200"/>
               </a:spcAft>
@@ -7256,17 +7685,40 @@
               </a:defRPr>
             </a:pPr>
             <a:r>
-              <a:t>▸ The Scale of Exposure</a:t>
-            </a:r>
-          </a:p>
-          <a:p>
-            <a:pPr algn="ctr">
-              <a:lnSpc>
-                <a:spcPts val="4199"/>
-              </a:lnSpc>
-              <a:spcBef>
-                <a:spcPct val="0"/>
-              </a:spcBef>
+              <a:rPr sz="2400" b="1" dirty="0">
+                <a:latin typeface="Times New Roman" panose="02020603050405020304" pitchFamily="18" charset="0"/>
+                <a:cs typeface="Times New Roman" panose="02020603050405020304" pitchFamily="18" charset="0"/>
+              </a:rPr>
+              <a:t>• High-Concurrency Gateway Bottlenecks: </a:t>
+            </a:r>
+            <a:r>
+              <a:rPr sz="2400" dirty="0">
+                <a:latin typeface="Times New Roman" panose="02020603050405020304" pitchFamily="18" charset="0"/>
+                <a:cs typeface="Times New Roman" panose="02020603050405020304" pitchFamily="18" charset="0"/>
+              </a:rPr>
+              <a:t>Enterprise VPN concentrators cannot tolerate serial hybrid handshake delays (&gt;110 </a:t>
+            </a:r>
+            <a:r>
+              <a:rPr sz="2400" dirty="0" err="1">
+                <a:latin typeface="Times New Roman" panose="02020603050405020304" pitchFamily="18" charset="0"/>
+                <a:cs typeface="Times New Roman" panose="02020603050405020304" pitchFamily="18" charset="0"/>
+              </a:rPr>
+              <a:t>ms</a:t>
+            </a:r>
+            <a:r>
+              <a:rPr sz="2400" dirty="0">
+                <a:latin typeface="Times New Roman" panose="02020603050405020304" pitchFamily="18" charset="0"/>
+                <a:cs typeface="Times New Roman" panose="02020603050405020304" pitchFamily="18" charset="0"/>
+              </a:rPr>
+              <a:t> round-trips), leading to dropped sessions and severe throughput loss.</a:t>
+            </a:r>
+            <a:endParaRPr lang="en-US" sz="2400" dirty="0">
+              <a:latin typeface="Times New Roman" panose="02020603050405020304" pitchFamily="18" charset="0"/>
+              <a:cs typeface="Times New Roman" panose="02020603050405020304" pitchFamily="18" charset="0"/>
+            </a:endParaRPr>
+          </a:p>
+          <a:p>
+            <a:pPr>
               <a:spcAft>
                 <a:spcPts val="1200"/>
               </a:spcAft>
@@ -7277,18 +7729,13 @@
                 <a:latin typeface="IBM Plex Sans"/>
               </a:defRPr>
             </a:pPr>
-            <a:r>
-              <a:t>   Over 4.5 billion people use VPN-dependent services. Quantum computers with ~4,000 logical qubits could break RSA-2048 in hours. Google's Willow chip (2024) demonstrated 105 qubits with error-correction breakthroughs — the timeline is accelerating.</a:t>
-            </a:r>
-          </a:p>
-          <a:p>
-            <a:pPr algn="ctr">
-              <a:lnSpc>
-                <a:spcPts val="4199"/>
-              </a:lnSpc>
-              <a:spcBef>
-                <a:spcPct val="0"/>
-              </a:spcBef>
+            <a:endParaRPr sz="2400" dirty="0">
+              <a:latin typeface="Times New Roman" panose="02020603050405020304" pitchFamily="18" charset="0"/>
+              <a:cs typeface="Times New Roman" panose="02020603050405020304" pitchFamily="18" charset="0"/>
+            </a:endParaRPr>
+          </a:p>
+          <a:p>
+            <a:pPr>
               <a:spcAft>
                 <a:spcPts val="1200"/>
               </a:spcAft>
@@ -7300,51 +7747,18 @@
               </a:defRPr>
             </a:pPr>
             <a:r>
-              <a:t/>
-            </a:r>
-          </a:p>
-          <a:p>
-            <a:pPr algn="ctr">
-              <a:lnSpc>
-                <a:spcPts val="4199"/>
-              </a:lnSpc>
-              <a:spcBef>
-                <a:spcPct val="0"/>
-              </a:spcBef>
-              <a:spcAft>
-                <a:spcPts val="1200"/>
-              </a:spcAft>
-              <a:defRPr sz="1900">
-                <a:solidFill>
-                  <a:srgbClr val="1E293B"/>
-                </a:solidFill>
-                <a:latin typeface="IBM Plex Sans"/>
-              </a:defRPr>
-            </a:pPr>
-            <a:r>
-              <a:t>▸ Regulatory Urgency: NIST Has Already Acted</a:t>
-            </a:r>
-          </a:p>
-          <a:p>
-            <a:pPr algn="ctr">
-              <a:lnSpc>
-                <a:spcPts val="4199"/>
-              </a:lnSpc>
-              <a:spcBef>
-                <a:spcPct val="0"/>
-              </a:spcBef>
-              <a:spcAft>
-                <a:spcPts val="1200"/>
-              </a:spcAft>
-              <a:defRPr sz="1900">
-                <a:solidFill>
-                  <a:srgbClr val="1E293B"/>
-                </a:solidFill>
-                <a:latin typeface="IBM Plex Sans"/>
-              </a:defRPr>
-            </a:pPr>
-            <a:r>
-              <a:t>   NIST FIPS 203 (ML-KEM), FIPS 204 (ML-DSA), and FIPS 205 (SLH-DSA) were finalised August 2024. NSA mandates CNSA 2.0 (ML-KEM-1024) by 2030 for all classified networks. Organisations that do not transition NOW face compliance failure and catastrophic data breach liability.</a:t>
+              <a:rPr sz="2400" b="1" dirty="0">
+                <a:latin typeface="Times New Roman" panose="02020603050405020304" pitchFamily="18" charset="0"/>
+                <a:cs typeface="Times New Roman" panose="02020603050405020304" pitchFamily="18" charset="0"/>
+              </a:rPr>
+              <a:t>• Urgent Compliance Mandate: </a:t>
+            </a:r>
+            <a:r>
+              <a:rPr sz="2400" dirty="0">
+                <a:latin typeface="Times New Roman" panose="02020603050405020304" pitchFamily="18" charset="0"/>
+                <a:cs typeface="Times New Roman" panose="02020603050405020304" pitchFamily="18" charset="0"/>
+              </a:rPr>
+              <a:t>NSA CNSA 2.0 and NIST mandates require organizations to transition to post-quantum standards immediately; migration cannot wait for quantum hardware supremacy.</a:t>
             </a:r>
           </a:p>
         </p:txBody>
@@ -8090,35 +8504,8 @@
         </p:nvSpPr>
         <p:spPr>
           <a:xfrm>
-            <a:off x="7326063" y="1937259"/>
-            <a:ext cx="3027283" cy="497841"/>
-          </a:xfrm>
-          <a:prstGeom prst="rect">
-            <a:avLst/>
-          </a:prstGeom>
-        </p:spPr>
-        <p:txBody>
-          <a:bodyPr lIns="0" tIns="0" rIns="0" bIns="0" rtlCol="0" anchor="t">
-            <a:spAutoFit/>
-          </a:bodyPr>
-          <a:lstStyle/>
-          <a:p>
-            <a:r>
-              <a:t>PROPOSED SOLUTION</a:t>
-            </a:r>
-          </a:p>
-        </p:txBody>
-      </p:sp>
-      <p:sp>
-        <p:nvSpPr>
-          <p:cNvPr id="25" name="TextBox 25"/>
-          <p:cNvSpPr txBox="1"/>
-          <p:nvPr/>
-        </p:nvSpPr>
-        <p:spPr>
-          <a:xfrm>
-            <a:off x="2594729" y="3522364"/>
-            <a:ext cx="13098542" cy="5678478"/>
+            <a:off x="5503666" y="1893761"/>
+            <a:ext cx="7498700" cy="538609"/>
           </a:xfrm>
           <a:prstGeom prst="rect">
             <a:avLst/>
@@ -8131,6 +8518,50 @@
           <a:lstStyle/>
           <a:p>
             <a:pPr algn="ctr">
+              <a:lnSpc>
+                <a:spcPts val="4059"/>
+              </a:lnSpc>
+              <a:spcBef>
+                <a:spcPct val="0"/>
+              </a:spcBef>
+            </a:pPr>
+            <a:r>
+              <a:rPr lang="en-US" sz="4800" b="1" dirty="0">
+                <a:solidFill>
+                  <a:srgbClr val="000000"/>
+                </a:solidFill>
+                <a:latin typeface="Times New Roman" panose="02020603050405020304" pitchFamily="18" charset="0"/>
+                <a:ea typeface="IBM Plex Sans"/>
+                <a:cs typeface="Times New Roman" panose="02020603050405020304" pitchFamily="18" charset="0"/>
+                <a:sym typeface="IBM Plex Sans"/>
+              </a:rPr>
+              <a:t>PROPOSEDS SOLUTION</a:t>
+            </a:r>
+          </a:p>
+        </p:txBody>
+      </p:sp>
+      <p:sp>
+        <p:nvSpPr>
+          <p:cNvPr id="25" name="TextBox 25"/>
+          <p:cNvSpPr txBox="1"/>
+          <p:nvPr/>
+        </p:nvSpPr>
+        <p:spPr>
+          <a:xfrm>
+            <a:off x="2703745" y="2819543"/>
+            <a:ext cx="13098542" cy="6640279"/>
+          </a:xfrm>
+          <a:prstGeom prst="rect">
+            <a:avLst/>
+          </a:prstGeom>
+        </p:spPr>
+        <p:txBody>
+          <a:bodyPr wrap="square" lIns="0" tIns="0" rIns="0" bIns="0" rtlCol="0" anchor="t">
+            <a:spAutoFit/>
+          </a:bodyPr>
+          <a:lstStyle/>
+          <a:p>
+            <a:pPr>
               <a:lnSpc>
                 <a:spcPts val="3919"/>
               </a:lnSpc>
@@ -8148,11 +8579,19 @@
               </a:defRPr>
             </a:pPr>
             <a:r>
-              <a:t>▸ PQC H-365: Quantum-Resistant Hybrid VPN &amp; Secure Channel</a:t>
-            </a:r>
-          </a:p>
-          <a:p>
-            <a:pPr algn="ctr">
+              <a:rPr sz="2400" dirty="0">
+                <a:latin typeface="Times New Roman" panose="02020603050405020304" pitchFamily="18" charset="0"/>
+                <a:cs typeface="Times New Roman" panose="02020603050405020304" pitchFamily="18" charset="0"/>
+              </a:rPr>
+              <a:t>• PQC H-365: A production-grade, quantum-resistant hybrid VPN and multi-message secure transport protocol engineered in native C.</a:t>
+            </a:r>
+            <a:endParaRPr lang="en-US" sz="2400" dirty="0">
+              <a:latin typeface="Times New Roman" panose="02020603050405020304" pitchFamily="18" charset="0"/>
+              <a:cs typeface="Times New Roman" panose="02020603050405020304" pitchFamily="18" charset="0"/>
+            </a:endParaRPr>
+          </a:p>
+          <a:p>
+            <a:pPr>
               <a:lnSpc>
                 <a:spcPts val="3919"/>
               </a:lnSpc>
@@ -8169,18 +8608,13 @@
                 <a:latin typeface="IBM Plex Sans"/>
               </a:defRPr>
             </a:pPr>
-            <a:r>
-              <a:t>   A production-grade, quantum-resistant hybrid VPN and multi-message secure transport protocol engineered entirely in native C.</a:t>
-            </a:r>
-          </a:p>
-          <a:p>
-            <a:pPr algn="ctr">
-              <a:lnSpc>
-                <a:spcPts val="3919"/>
-              </a:lnSpc>
-              <a:spcBef>
-                <a:spcPct val="0"/>
-              </a:spcBef>
+            <a:endParaRPr sz="2400" dirty="0">
+              <a:latin typeface="Times New Roman" panose="02020603050405020304" pitchFamily="18" charset="0"/>
+              <a:cs typeface="Times New Roman" panose="02020603050405020304" pitchFamily="18" charset="0"/>
+            </a:endParaRPr>
+          </a:p>
+          <a:p>
+            <a:pPr>
               <a:spcAft>
                 <a:spcPts val="1200"/>
               </a:spcAft>
@@ -8192,17 +8626,19 @@
               </a:defRPr>
             </a:pPr>
             <a:r>
-              <a:t/>
-            </a:r>
-          </a:p>
-          <a:p>
-            <a:pPr algn="ctr">
-              <a:lnSpc>
-                <a:spcPts val="3919"/>
-              </a:lnSpc>
-              <a:spcBef>
-                <a:spcPct val="0"/>
-              </a:spcBef>
+              <a:rPr sz="2400" dirty="0">
+                <a:latin typeface="Times New Roman" panose="02020603050405020304" pitchFamily="18" charset="0"/>
+                <a:cs typeface="Times New Roman" panose="02020603050405020304" pitchFamily="18" charset="0"/>
+              </a:rPr>
+              <a:t>• Dual-Security Hybrid Paradigm: Fuses classical X25519 (ECDH) with NIST FIPS 203 (ML-KEM-768) via RFC 5869 HKDF-SHA256. Adversaries must break BOTH classical elliptic curves AND lattice math to compromise the key.</a:t>
+            </a:r>
+            <a:endParaRPr lang="en-US" sz="2400" dirty="0">
+              <a:latin typeface="Times New Roman" panose="02020603050405020304" pitchFamily="18" charset="0"/>
+              <a:cs typeface="Times New Roman" panose="02020603050405020304" pitchFamily="18" charset="0"/>
+            </a:endParaRPr>
+          </a:p>
+          <a:p>
+            <a:pPr>
               <a:spcAft>
                 <a:spcPts val="1200"/>
               </a:spcAft>
@@ -8213,18 +8649,13 @@
                 <a:latin typeface="IBM Plex Sans"/>
               </a:defRPr>
             </a:pPr>
-            <a:r>
-              <a:t>▸ Dual-Security Hybrid Architecture</a:t>
-            </a:r>
-          </a:p>
-          <a:p>
-            <a:pPr algn="ctr">
-              <a:lnSpc>
-                <a:spcPts val="3919"/>
-              </a:lnSpc>
-              <a:spcBef>
-                <a:spcPct val="0"/>
-              </a:spcBef>
+            <a:endParaRPr sz="2400" dirty="0">
+              <a:latin typeface="Times New Roman" panose="02020603050405020304" pitchFamily="18" charset="0"/>
+              <a:cs typeface="Times New Roman" panose="02020603050405020304" pitchFamily="18" charset="0"/>
+            </a:endParaRPr>
+          </a:p>
+          <a:p>
+            <a:pPr>
               <a:spcAft>
                 <a:spcPts val="1200"/>
               </a:spcAft>
@@ -8236,17 +8667,29 @@
               </a:defRPr>
             </a:pPr>
             <a:r>
-              <a:t>   Simultaneously executes X25519 (classical) + ML-KEM-768 (NIST FIPS 203) key encapsulation in parallel. Both secrets are hashed together with SHA-256 to derive the session key — secure against classical AND quantum adversaries.</a:t>
-            </a:r>
-          </a:p>
-          <a:p>
-            <a:pPr algn="ctr">
-              <a:lnSpc>
-                <a:spcPts val="3919"/>
-              </a:lnSpc>
-              <a:spcBef>
-                <a:spcPct val="0"/>
-              </a:spcBef>
+              <a:rPr sz="2400" dirty="0">
+                <a:latin typeface="Times New Roman" panose="02020603050405020304" pitchFamily="18" charset="0"/>
+                <a:cs typeface="Times New Roman" panose="02020603050405020304" pitchFamily="18" charset="0"/>
+              </a:rPr>
+              <a:t>• Mutual Post-Quantum Authentication (</a:t>
+            </a:r>
+            <a:r>
+              <a:rPr sz="2400" dirty="0" err="1">
+                <a:latin typeface="Times New Roman" panose="02020603050405020304" pitchFamily="18" charset="0"/>
+                <a:cs typeface="Times New Roman" panose="02020603050405020304" pitchFamily="18" charset="0"/>
+              </a:rPr>
+              <a:t>mPQC</a:t>
+            </a:r>
+            <a:r>
+              <a:rPr sz="2400" dirty="0">
+                <a:latin typeface="Times New Roman" panose="02020603050405020304" pitchFamily="18" charset="0"/>
+                <a:cs typeface="Times New Roman" panose="02020603050405020304" pitchFamily="18" charset="0"/>
+              </a:rPr>
+              <a:t>): Implements NIST FIPS 204 (ML-DSA-65) transcript digital signatures, eliminating quantum Man-in-the-Middle (MitM) and active downgrade attacks.</a:t>
+            </a:r>
+          </a:p>
+          <a:p>
+            <a:pPr>
               <a:spcAft>
                 <a:spcPts val="1200"/>
               </a:spcAft>
@@ -8258,17 +8701,26 @@
               </a:defRPr>
             </a:pPr>
             <a:r>
-              <a:t/>
-            </a:r>
-          </a:p>
-          <a:p>
-            <a:pPr algn="ctr">
-              <a:lnSpc>
-                <a:spcPts val="3919"/>
-              </a:lnSpc>
-              <a:spcBef>
-                <a:spcPct val="0"/>
-              </a:spcBef>
+              <a:rPr sz="2400" dirty="0">
+                <a:latin typeface="Times New Roman" panose="02020603050405020304" pitchFamily="18" charset="0"/>
+                <a:cs typeface="Times New Roman" panose="02020603050405020304" pitchFamily="18" charset="0"/>
+              </a:rPr>
+              <a:t>• Parallelized Handshake Acceleration: Asynchronous POSIX multithreaded key exchange pipeline that computes X25519 and ML-KEM-768 concurrently, slashing handshake latency to ~11 </a:t>
+            </a:r>
+            <a:r>
+              <a:rPr sz="2400" dirty="0" err="1">
+                <a:latin typeface="Times New Roman" panose="02020603050405020304" pitchFamily="18" charset="0"/>
+                <a:cs typeface="Times New Roman" panose="02020603050405020304" pitchFamily="18" charset="0"/>
+              </a:rPr>
+              <a:t>ms.</a:t>
+            </a:r>
+            <a:endParaRPr lang="en-US" sz="2400" dirty="0">
+              <a:latin typeface="Times New Roman" panose="02020603050405020304" pitchFamily="18" charset="0"/>
+              <a:cs typeface="Times New Roman" panose="02020603050405020304" pitchFamily="18" charset="0"/>
+            </a:endParaRPr>
+          </a:p>
+          <a:p>
+            <a:pPr>
               <a:spcAft>
                 <a:spcPts val="1200"/>
               </a:spcAft>
@@ -8279,18 +8731,13 @@
                 <a:latin typeface="IBM Plex Sans"/>
               </a:defRPr>
             </a:pPr>
-            <a:r>
-              <a:t>▸ Authenticated Encryption (AEAD)</a:t>
-            </a:r>
-          </a:p>
-          <a:p>
-            <a:pPr algn="ctr">
-              <a:lnSpc>
-                <a:spcPts val="3919"/>
-              </a:lnSpc>
-              <a:spcBef>
-                <a:spcPct val="0"/>
-              </a:spcBef>
+            <a:endParaRPr sz="2400" dirty="0">
+              <a:latin typeface="Times New Roman" panose="02020603050405020304" pitchFamily="18" charset="0"/>
+              <a:cs typeface="Times New Roman" panose="02020603050405020304" pitchFamily="18" charset="0"/>
+            </a:endParaRPr>
+          </a:p>
+          <a:p>
+            <a:pPr>
               <a:spcAft>
                 <a:spcPts val="1200"/>
               </a:spcAft>
@@ -8302,139 +8749,11 @@
               </a:defRPr>
             </a:pPr>
             <a:r>
-              <a:t>   ChaCha20-Poly1305 provides 256-bit symmetric encryption with built-in authentication tags, preventing both eavesdropping and tampering.</a:t>
-            </a:r>
-          </a:p>
-          <a:p>
-            <a:pPr algn="ctr">
-              <a:lnSpc>
-                <a:spcPts val="3919"/>
-              </a:lnSpc>
-              <a:spcBef>
-                <a:spcPct val="0"/>
-              </a:spcBef>
-              <a:spcAft>
-                <a:spcPts val="1200"/>
-              </a:spcAft>
-              <a:defRPr sz="1800">
-                <a:solidFill>
-                  <a:srgbClr val="1E293B"/>
-                </a:solidFill>
-                <a:latin typeface="IBM Plex Sans"/>
-              </a:defRPr>
-            </a:pPr>
-            <a:r>
-              <a:t/>
-            </a:r>
-          </a:p>
-          <a:p>
-            <a:pPr algn="ctr">
-              <a:lnSpc>
-                <a:spcPts val="3919"/>
-              </a:lnSpc>
-              <a:spcBef>
-                <a:spcPct val="0"/>
-              </a:spcBef>
-              <a:spcAft>
-                <a:spcPts val="1200"/>
-              </a:spcAft>
-              <a:defRPr sz="1800">
-                <a:solidFill>
-                  <a:srgbClr val="1E293B"/>
-                </a:solidFill>
-                <a:latin typeface="IBM Plex Sans"/>
-              </a:defRPr>
-            </a:pPr>
-            <a:r>
-              <a:t>▸ Multi-Message Secure Channel (Step 27-28)</a:t>
-            </a:r>
-          </a:p>
-          <a:p>
-            <a:pPr algn="ctr">
-              <a:lnSpc>
-                <a:spcPts val="3919"/>
-              </a:lnSpc>
-              <a:spcBef>
-                <a:spcPct val="0"/>
-              </a:spcBef>
-              <a:spcAft>
-                <a:spcPts val="1200"/>
-              </a:spcAft>
-              <a:defRPr sz="1800">
-                <a:solidFill>
-                  <a:srgbClr val="1E293B"/>
-                </a:solidFill>
-                <a:latin typeface="IBM Plex Sans"/>
-              </a:defRPr>
-            </a:pPr>
-            <a:r>
-              <a:t>   A full client/server TCP channel with monotonic counter replay-protection, persistent session keys, and encrypted multi-message exchange — validated live.</a:t>
-            </a:r>
-          </a:p>
-          <a:p>
-            <a:pPr algn="ctr">
-              <a:lnSpc>
-                <a:spcPts val="3919"/>
-              </a:lnSpc>
-              <a:spcBef>
-                <a:spcPct val="0"/>
-              </a:spcBef>
-              <a:spcAft>
-                <a:spcPts val="1200"/>
-              </a:spcAft>
-              <a:defRPr sz="1800">
-                <a:solidFill>
-                  <a:srgbClr val="1E293B"/>
-                </a:solidFill>
-                <a:latin typeface="IBM Plex Sans"/>
-              </a:defRPr>
-            </a:pPr>
-            <a:r>
-              <a:t/>
-            </a:r>
-          </a:p>
-          <a:p>
-            <a:pPr algn="ctr">
-              <a:lnSpc>
-                <a:spcPts val="3919"/>
-              </a:lnSpc>
-              <a:spcBef>
-                <a:spcPct val="0"/>
-              </a:spcBef>
-              <a:spcAft>
-                <a:spcPts val="1200"/>
-              </a:spcAft>
-              <a:defRPr sz="1800">
-                <a:solidFill>
-                  <a:srgbClr val="1E293B"/>
-                </a:solidFill>
-                <a:latin typeface="IBM Plex Sans"/>
-              </a:defRPr>
-            </a:pPr>
-            <a:r>
-              <a:t>▸ Open-Source &amp; Production-Ready</a:t>
-            </a:r>
-          </a:p>
-          <a:p>
-            <a:pPr algn="ctr">
-              <a:lnSpc>
-                <a:spcPts val="3919"/>
-              </a:lnSpc>
-              <a:spcBef>
-                <a:spcPct val="0"/>
-              </a:spcBef>
-              <a:spcAft>
-                <a:spcPts val="1200"/>
-              </a:spcAft>
-              <a:defRPr sz="1800">
-                <a:solidFill>
-                  <a:srgbClr val="1E293B"/>
-                </a:solidFill>
-                <a:latin typeface="IBM Plex Sans"/>
-              </a:defRPr>
-            </a:pPr>
-            <a:r>
-              <a:t>   Apache 2.0 licensed at github.com/chipashacosmas/PQC-H365. Drop-in replacement for any ECDHE-based VPN handshake.</a:t>
+              <a:rPr sz="2400" dirty="0">
+                <a:latin typeface="Times New Roman" panose="02020603050405020304" pitchFamily="18" charset="0"/>
+                <a:cs typeface="Times New Roman" panose="02020603050405020304" pitchFamily="18" charset="0"/>
+              </a:rPr>
+              <a:t>• Replay-Protected Multi-Message Transport: AES-256-GCM authenticated transport binding 64-bit monotonic sequence numbers to prevent packet replay, injection, and reflection attacks.</a:t>
             </a:r>
           </a:p>
         </p:txBody>
@@ -9119,35 +9438,8 @@
         </p:nvSpPr>
         <p:spPr>
           <a:xfrm>
-            <a:off x="7514703" y="1963294"/>
-            <a:ext cx="2342555" cy="944297"/>
-          </a:xfrm>
-          <a:prstGeom prst="rect">
-            <a:avLst/>
-          </a:prstGeom>
-        </p:spPr>
-        <p:txBody>
-          <a:bodyPr lIns="0" tIns="0" rIns="0" bIns="0" rtlCol="0" anchor="t">
-            <a:spAutoFit/>
-          </a:bodyPr>
-          <a:lstStyle/>
-          <a:p>
-            <a:r>
-              <a:t>WHY QUANTUM? (THE TECHNICAL NECESSITY)</a:t>
-            </a:r>
-          </a:p>
-        </p:txBody>
-      </p:sp>
-      <p:sp>
-        <p:nvSpPr>
-          <p:cNvPr id="23" name="TextBox 23"/>
-          <p:cNvSpPr txBox="1"/>
-          <p:nvPr/>
-        </p:nvSpPr>
-        <p:spPr>
-          <a:xfrm>
-            <a:off x="1114842" y="4008081"/>
-            <a:ext cx="16058316" cy="3498394"/>
+            <a:off x="6220242" y="1986053"/>
+            <a:ext cx="4220097" cy="495713"/>
           </a:xfrm>
           <a:prstGeom prst="rect">
             <a:avLst/>
@@ -9161,7 +9453,51 @@
           <a:p>
             <a:pPr algn="ctr">
               <a:lnSpc>
-                <a:spcPts val="3219"/>
+                <a:spcPts val="3779"/>
+              </a:lnSpc>
+              <a:spcBef>
+                <a:spcPct val="0"/>
+              </a:spcBef>
+            </a:pPr>
+            <a:r>
+              <a:rPr lang="en-US" sz="4000" b="1" dirty="0">
+                <a:solidFill>
+                  <a:srgbClr val="000000"/>
+                </a:solidFill>
+                <a:latin typeface="IBM Plex Sans"/>
+                <a:ea typeface="IBM Plex Sans"/>
+                <a:cs typeface="IBM Plex Sans"/>
+                <a:sym typeface="IBM Plex Sans"/>
+              </a:rPr>
+              <a:t>WHY QUANTUM?</a:t>
+            </a:r>
+          </a:p>
+        </p:txBody>
+      </p:sp>
+      <p:sp>
+        <p:nvSpPr>
+          <p:cNvPr id="23" name="TextBox 23"/>
+          <p:cNvSpPr txBox="1"/>
+          <p:nvPr/>
+        </p:nvSpPr>
+        <p:spPr>
+          <a:xfrm>
+            <a:off x="1114842" y="2880859"/>
+            <a:ext cx="16058316" cy="6950942"/>
+          </a:xfrm>
+          <a:prstGeom prst="rect">
+            <a:avLst/>
+          </a:prstGeom>
+        </p:spPr>
+        <p:txBody>
+          <a:bodyPr wrap="square" lIns="0" tIns="0" rIns="0" bIns="0" rtlCol="0" anchor="t">
+            <a:spAutoFit/>
+          </a:bodyPr>
+          <a:lstStyle/>
+          <a:p>
+            <a:pPr>
+              <a:lnSpc>
+                <a:spcPct val="150000"/>
               </a:lnSpc>
               <a:spcBef>
                 <a:spcPct val="0"/>
@@ -9177,13 +9513,35 @@
               </a:defRPr>
             </a:pPr>
             <a:r>
-              <a:t>▸ Existential Quantum Threat — Mathematical, Not Engineering</a:t>
-            </a:r>
-          </a:p>
-          <a:p>
-            <a:pPr algn="ctr">
+              <a:rPr b="1" dirty="0">
+                <a:latin typeface="Times New Roman" panose="02020603050405020304" pitchFamily="18" charset="0"/>
+                <a:cs typeface="Times New Roman" panose="02020603050405020304" pitchFamily="18" charset="0"/>
+              </a:rPr>
+              <a:t>• </a:t>
+            </a:r>
+            <a:r>
+              <a:rPr sz="2400" b="1" dirty="0">
+                <a:latin typeface="Times New Roman" panose="02020603050405020304" pitchFamily="18" charset="0"/>
+                <a:cs typeface="Times New Roman" panose="02020603050405020304" pitchFamily="18" charset="0"/>
+              </a:rPr>
+              <a:t>Existential Quantum Threat: </a:t>
+            </a:r>
+            <a:r>
+              <a:rPr sz="2400" dirty="0">
+                <a:latin typeface="Times New Roman" panose="02020603050405020304" pitchFamily="18" charset="0"/>
+                <a:cs typeface="Times New Roman" panose="02020603050405020304" pitchFamily="18" charset="0"/>
+              </a:rPr>
+              <a:t>The threat is fundamental mathematics. Only quantum-resistant mathematical lattices (Module-LWE and Module-SIS) provide provable security against Shor's algorithm.</a:t>
+            </a:r>
+            <a:endParaRPr lang="en-US" sz="2400" dirty="0">
+              <a:latin typeface="Times New Roman" panose="02020603050405020304" pitchFamily="18" charset="0"/>
+              <a:cs typeface="Times New Roman" panose="02020603050405020304" pitchFamily="18" charset="0"/>
+            </a:endParaRPr>
+          </a:p>
+          <a:p>
+            <a:pPr>
               <a:lnSpc>
-                <a:spcPts val="3219"/>
+                <a:spcPct val="150000"/>
               </a:lnSpc>
               <a:spcBef>
                 <a:spcPct val="0"/>
@@ -9198,18 +9556,16 @@
                 <a:latin typeface="IBM Plex Sans"/>
               </a:defRPr>
             </a:pPr>
-            <a:r>
-              <a:t>   Only quantum-resistant mathematical lattices (Module-LWE and Module-SIS) provide provable hardness against quantum attacks. This is not a software update — it requires a new cryptographic foundation.</a:t>
-            </a:r>
-          </a:p>
-          <a:p>
-            <a:pPr algn="ctr">
+            <a:endParaRPr sz="2400" dirty="0">
+              <a:latin typeface="Times New Roman" panose="02020603050405020304" pitchFamily="18" charset="0"/>
+              <a:cs typeface="Times New Roman" panose="02020603050405020304" pitchFamily="18" charset="0"/>
+            </a:endParaRPr>
+          </a:p>
+          <a:p>
+            <a:pPr>
               <a:lnSpc>
-                <a:spcPts val="3219"/>
+                <a:spcPct val="150000"/>
               </a:lnSpc>
-              <a:spcBef>
-                <a:spcPct val="0"/>
-              </a:spcBef>
               <a:spcAft>
                 <a:spcPts val="1200"/>
               </a:spcAft>
@@ -9221,17 +9577,29 @@
               </a:defRPr>
             </a:pPr>
             <a:r>
-              <a:t/>
-            </a:r>
-          </a:p>
-          <a:p>
-            <a:pPr algn="ctr">
+              <a:rPr sz="2400" b="1" dirty="0">
+                <a:latin typeface="Times New Roman" panose="02020603050405020304" pitchFamily="18" charset="0"/>
+                <a:cs typeface="Times New Roman" panose="02020603050405020304" pitchFamily="18" charset="0"/>
+              </a:rPr>
+              <a:t>• NIST Standards Alignment: </a:t>
+            </a:r>
+            <a:r>
+              <a:rPr sz="2400" dirty="0">
+                <a:latin typeface="Times New Roman" panose="02020603050405020304" pitchFamily="18" charset="0"/>
+                <a:cs typeface="Times New Roman" panose="02020603050405020304" pitchFamily="18" charset="0"/>
+              </a:rPr>
+              <a:t>Adheres strictly to the newly finalized NIST Post-Quantum Cryptography standards: FIPS 203 (ML-KEM-768) and FIPS 204 (ML-DSA-65).</a:t>
+            </a:r>
+            <a:endParaRPr lang="en-US" sz="2400" dirty="0">
+              <a:latin typeface="Times New Roman" panose="02020603050405020304" pitchFamily="18" charset="0"/>
+              <a:cs typeface="Times New Roman" panose="02020603050405020304" pitchFamily="18" charset="0"/>
+            </a:endParaRPr>
+          </a:p>
+          <a:p>
+            <a:pPr>
               <a:lnSpc>
-                <a:spcPts val="3219"/>
+                <a:spcPct val="150000"/>
               </a:lnSpc>
-              <a:spcBef>
-                <a:spcPct val="0"/>
-              </a:spcBef>
               <a:spcAft>
                 <a:spcPts val="1200"/>
               </a:spcAft>
@@ -9242,18 +9610,16 @@
                 <a:latin typeface="IBM Plex Sans"/>
               </a:defRPr>
             </a:pPr>
-            <a:r>
-              <a:t>▸ ML-KEM-768 — The NIST-Standardised Answer (FIPS 203)</a:t>
-            </a:r>
-          </a:p>
-          <a:p>
-            <a:pPr algn="ctr">
+            <a:endParaRPr sz="2400" dirty="0">
+              <a:latin typeface="Times New Roman" panose="02020603050405020304" pitchFamily="18" charset="0"/>
+              <a:cs typeface="Times New Roman" panose="02020603050405020304" pitchFamily="18" charset="0"/>
+            </a:endParaRPr>
+          </a:p>
+          <a:p>
+            <a:pPr>
               <a:lnSpc>
-                <a:spcPts val="3219"/>
+                <a:spcPct val="150000"/>
               </a:lnSpc>
-              <a:spcBef>
-                <a:spcPct val="0"/>
-              </a:spcBef>
               <a:spcAft>
                 <a:spcPts val="1200"/>
               </a:spcAft>
@@ -9265,17 +9631,29 @@
               </a:defRPr>
             </a:pPr>
             <a:r>
-              <a:t>   Security: Module-LWE with n=768, ≥161-bit quantum security. Keys: 1184 bytes (public), 2400 bytes (private). Ciphertext: 1088 bytes. Performance: Encapsulate 8.43 ms, Decapsulate 8.11 ms (verified).</a:t>
-            </a:r>
-          </a:p>
-          <a:p>
-            <a:pPr algn="ctr">
+              <a:rPr sz="2400" b="1" dirty="0">
+                <a:latin typeface="Times New Roman" panose="02020603050405020304" pitchFamily="18" charset="0"/>
+                <a:cs typeface="Times New Roman" panose="02020603050405020304" pitchFamily="18" charset="0"/>
+              </a:rPr>
+              <a:t>• Why Classical Hardening Fails: </a:t>
+            </a:r>
+            <a:r>
+              <a:rPr sz="2400" dirty="0">
+                <a:latin typeface="Times New Roman" panose="02020603050405020304" pitchFamily="18" charset="0"/>
+                <a:cs typeface="Times New Roman" panose="02020603050405020304" pitchFamily="18" charset="0"/>
+              </a:rPr>
+              <a:t>Simply increasing classical RSA or ECC key lengths does not prevent quantum polynomial-time attacks. Lattice-based post-quantum primitives are mathematically mandatory.</a:t>
+            </a:r>
+            <a:endParaRPr lang="en-US" sz="2400" dirty="0">
+              <a:latin typeface="Times New Roman" panose="02020603050405020304" pitchFamily="18" charset="0"/>
+              <a:cs typeface="Times New Roman" panose="02020603050405020304" pitchFamily="18" charset="0"/>
+            </a:endParaRPr>
+          </a:p>
+          <a:p>
+            <a:pPr>
               <a:lnSpc>
-                <a:spcPts val="3219"/>
+                <a:spcPct val="150000"/>
               </a:lnSpc>
-              <a:spcBef>
-                <a:spcPct val="0"/>
-              </a:spcBef>
               <a:spcAft>
                 <a:spcPts val="1200"/>
               </a:spcAft>
@@ -9286,18 +9664,16 @@
                 <a:latin typeface="IBM Plex Sans"/>
               </a:defRPr>
             </a:pPr>
-            <a:r>
-              <a:t/>
-            </a:r>
-          </a:p>
-          <a:p>
-            <a:pPr algn="ctr">
+            <a:endParaRPr sz="2400" dirty="0">
+              <a:latin typeface="Times New Roman" panose="02020603050405020304" pitchFamily="18" charset="0"/>
+              <a:cs typeface="Times New Roman" panose="02020603050405020304" pitchFamily="18" charset="0"/>
+            </a:endParaRPr>
+          </a:p>
+          <a:p>
+            <a:pPr>
               <a:lnSpc>
-                <a:spcPts val="3219"/>
+                <a:spcPct val="150000"/>
               </a:lnSpc>
-              <a:spcBef>
-                <a:spcPct val="0"/>
-              </a:spcBef>
               <a:spcAft>
                 <a:spcPts val="1200"/>
               </a:spcAft>
@@ -9309,95 +9685,18 @@
               </a:defRPr>
             </a:pPr>
             <a:r>
-              <a:t>▸ Hybrid Approach: Zero Trust in Transition</a:t>
-            </a:r>
-          </a:p>
-          <a:p>
-            <a:pPr algn="ctr">
-              <a:lnSpc>
-                <a:spcPts val="3219"/>
-              </a:lnSpc>
-              <a:spcBef>
-                <a:spcPct val="0"/>
-              </a:spcBef>
-              <a:spcAft>
-                <a:spcPts val="1200"/>
-              </a:spcAft>
-              <a:defRPr sz="1900">
-                <a:solidFill>
-                  <a:srgbClr val="1E293B"/>
-                </a:solidFill>
-                <a:latin typeface="IBM Plex Sans"/>
-              </a:defRPr>
-            </a:pPr>
-            <a:r>
-              <a:t>   By running X25519 AND ML-KEM-768 simultaneously, PQC H-365 is secure even if ML-KEM is broken (classical fallback) and even if X25519 is broken by a quantum computer. Attack both simultaneously — which no known adversary can do.</a:t>
-            </a:r>
-          </a:p>
-          <a:p>
-            <a:pPr algn="ctr">
-              <a:lnSpc>
-                <a:spcPts val="3219"/>
-              </a:lnSpc>
-              <a:spcBef>
-                <a:spcPct val="0"/>
-              </a:spcBef>
-              <a:spcAft>
-                <a:spcPts val="1200"/>
-              </a:spcAft>
-              <a:defRPr sz="1900">
-                <a:solidFill>
-                  <a:srgbClr val="1E293B"/>
-                </a:solidFill>
-                <a:latin typeface="IBM Plex Sans"/>
-              </a:defRPr>
-            </a:pPr>
-            <a:r>
-              <a:t/>
-            </a:r>
-          </a:p>
-          <a:p>
-            <a:pPr algn="ctr">
-              <a:lnSpc>
-                <a:spcPts val="3219"/>
-              </a:lnSpc>
-              <a:spcBef>
-                <a:spcPct val="0"/>
-              </a:spcBef>
-              <a:spcAft>
-                <a:spcPts val="1200"/>
-              </a:spcAft>
-              <a:defRPr sz="1900">
-                <a:solidFill>
-                  <a:srgbClr val="1E293B"/>
-                </a:solidFill>
-                <a:latin typeface="IBM Plex Sans"/>
-              </a:defRPr>
-            </a:pPr>
-            <a:r>
-              <a:t>▸ Parallel Execution Architecture (Step 18-19)</a:t>
-            </a:r>
-          </a:p>
-          <a:p>
-            <a:pPr algn="ctr">
-              <a:lnSpc>
-                <a:spcPts val="3219"/>
-              </a:lnSpc>
-              <a:spcBef>
-                <a:spcPct val="0"/>
-              </a:spcBef>
-              <a:spcAft>
-                <a:spcPts val="1200"/>
-              </a:spcAft>
-              <a:defRPr sz="1900">
-                <a:solidFill>
-                  <a:srgbClr val="1E293B"/>
-                </a:solidFill>
-                <a:latin typeface="IBM Plex Sans"/>
-              </a:defRPr>
-            </a:pPr>
-            <a:r>
-              <a:t>   POSIX pthreads execute both KEM handshakes concurrently, delivering 55.56 ms end-to-end vs 70+ ms sequential — a 21% latency reduction.</a:t>
+              <a:rPr sz="2400" b="1" dirty="0">
+                <a:latin typeface="Times New Roman" panose="02020603050405020304" pitchFamily="18" charset="0"/>
+                <a:cs typeface="Times New Roman" panose="02020603050405020304" pitchFamily="18" charset="0"/>
+              </a:rPr>
+              <a:t>• Bridging Quantum Theory to Real-World Networks: </a:t>
+            </a:r>
+            <a:r>
+              <a:rPr sz="2400" dirty="0">
+                <a:latin typeface="Times New Roman" panose="02020603050405020304" pitchFamily="18" charset="0"/>
+                <a:cs typeface="Times New Roman" panose="02020603050405020304" pitchFamily="18" charset="0"/>
+              </a:rPr>
+              <a:t>While quantum computers are being built, PQC H-365 provides the critical quantum-safe transport layer that secures data transmission across today's global internet.</a:t>
             </a:r>
           </a:p>
         </p:txBody>
@@ -9534,7 +9833,7 @@
               </a:pathLst>
             </a:custGeom>
             <a:blipFill>
-              <a:blip r:embed="rId2"/>
+              <a:blip r:embed="rId3"/>
               <a:stretch>
                 <a:fillRect b="2"/>
               </a:stretch>
@@ -9595,7 +9894,7 @@
               </a:pathLst>
             </a:custGeom>
             <a:blipFill>
-              <a:blip r:embed="rId2"/>
+              <a:blip r:embed="rId3"/>
               <a:stretch>
                 <a:fillRect b="2"/>
               </a:stretch>
@@ -9656,7 +9955,7 @@
               </a:pathLst>
             </a:custGeom>
             <a:blipFill>
-              <a:blip r:embed="rId2"/>
+              <a:blip r:embed="rId3"/>
               <a:stretch>
                 <a:fillRect b="2"/>
               </a:stretch>
@@ -9919,7 +10218,7 @@
             </a:pathLst>
           </a:custGeom>
           <a:blipFill>
-            <a:blip r:embed="rId3"/>
+            <a:blip r:embed="rId4"/>
             <a:stretch>
               <a:fillRect/>
             </a:stretch>
@@ -10006,7 +10305,7 @@
             </a:pathLst>
           </a:custGeom>
           <a:blipFill>
-            <a:blip r:embed="rId4"/>
+            <a:blip r:embed="rId5"/>
             <a:stretch>
               <a:fillRect/>
             </a:stretch>
@@ -10066,7 +10365,7 @@
               </a:pathLst>
             </a:custGeom>
             <a:blipFill>
-              <a:blip r:embed="rId5"/>
+              <a:blip r:embed="rId6"/>
               <a:stretch>
                 <a:fillRect b="1"/>
               </a:stretch>
@@ -10082,35 +10381,8 @@
         </p:nvSpPr>
         <p:spPr>
           <a:xfrm>
-            <a:off x="6298992" y="1988059"/>
-            <a:ext cx="4566285" cy="844398"/>
-          </a:xfrm>
-          <a:prstGeom prst="rect">
-            <a:avLst/>
-          </a:prstGeom>
-        </p:spPr>
-        <p:txBody>
-          <a:bodyPr lIns="0" tIns="0" rIns="0" bIns="0" rtlCol="0" anchor="t">
-            <a:spAutoFit/>
-          </a:bodyPr>
-          <a:lstStyle/>
-          <a:p>
-            <a:r>
-              <a:t>IMPLEMENTATION &amp; ARCHITECTURE</a:t>
-            </a:r>
-          </a:p>
-        </p:txBody>
-      </p:sp>
-      <p:sp>
-        <p:nvSpPr>
-          <p:cNvPr id="23" name="TextBox 23"/>
-          <p:cNvSpPr txBox="1"/>
-          <p:nvPr/>
-        </p:nvSpPr>
-        <p:spPr>
-          <a:xfrm>
-            <a:off x="950238" y="3737159"/>
-            <a:ext cx="16387524" cy="4389120"/>
+            <a:off x="5446826" y="1939862"/>
+            <a:ext cx="7555540" cy="418191"/>
           </a:xfrm>
           <a:prstGeom prst="rect">
             <a:avLst/>
@@ -10124,7 +10396,51 @@
           <a:p>
             <a:pPr algn="ctr">
               <a:lnSpc>
-                <a:spcPts val="3079"/>
+                <a:spcPts val="3359"/>
+              </a:lnSpc>
+              <a:spcBef>
+                <a:spcPct val="0"/>
+              </a:spcBef>
+            </a:pPr>
+            <a:r>
+              <a:rPr lang="en-US" sz="2800" b="1" dirty="0">
+                <a:solidFill>
+                  <a:srgbClr val="000000"/>
+                </a:solidFill>
+                <a:latin typeface="IBM Plex Sans"/>
+                <a:ea typeface="IBM Plex Sans"/>
+                <a:cs typeface="IBM Plex Sans"/>
+                <a:sym typeface="IBM Plex Sans"/>
+              </a:rPr>
+              <a:t>IMPLEMENTATION AND ARCHITECTURE</a:t>
+            </a:r>
+          </a:p>
+        </p:txBody>
+      </p:sp>
+      <p:sp>
+        <p:nvSpPr>
+          <p:cNvPr id="23" name="TextBox 23"/>
+          <p:cNvSpPr txBox="1"/>
+          <p:nvPr/>
+        </p:nvSpPr>
+        <p:spPr>
+          <a:xfrm>
+            <a:off x="1258898" y="2936267"/>
+            <a:ext cx="16387524" cy="6089167"/>
+          </a:xfrm>
+          <a:prstGeom prst="rect">
+            <a:avLst/>
+          </a:prstGeom>
+        </p:spPr>
+        <p:txBody>
+          <a:bodyPr wrap="square" lIns="0" tIns="0" rIns="0" bIns="0" rtlCol="0" anchor="t">
+            <a:spAutoFit/>
+          </a:bodyPr>
+          <a:lstStyle/>
+          <a:p>
+            <a:pPr>
+              <a:lnSpc>
+                <a:spcPct val="150000"/>
               </a:lnSpc>
               <a:spcBef>
                 <a:spcPct val="0"/>
@@ -10140,17 +10456,25 @@
               </a:defRPr>
             </a:pPr>
             <a:r>
-              <a:t>▸ High-Performance Native C Engine</a:t>
-            </a:r>
-          </a:p>
-          <a:p>
-            <a:pPr algn="ctr">
+              <a:rPr sz="2400" b="1" dirty="0">
+                <a:latin typeface="Times New Roman" panose="02020603050405020304" pitchFamily="18" charset="0"/>
+                <a:cs typeface="Times New Roman" panose="02020603050405020304" pitchFamily="18" charset="0"/>
+              </a:rPr>
+              <a:t>• High-Performance C Engine: </a:t>
+            </a:r>
+            <a:r>
+              <a:rPr sz="2400" dirty="0">
+                <a:latin typeface="Times New Roman" panose="02020603050405020304" pitchFamily="18" charset="0"/>
+                <a:cs typeface="Times New Roman" panose="02020603050405020304" pitchFamily="18" charset="0"/>
+              </a:rPr>
+              <a:t>Engineered in native C utilizing Open Quantum Safe (liboqs 0.10.0) and OpenSSL for cryptographic acceleration.</a:t>
+            </a:r>
+          </a:p>
+          <a:p>
+            <a:pPr>
               <a:lnSpc>
-                <a:spcPts val="3079"/>
+                <a:spcPct val="150000"/>
               </a:lnSpc>
-              <a:spcBef>
-                <a:spcPct val="0"/>
-              </a:spcBef>
               <a:spcAft>
                 <a:spcPts val="1200"/>
               </a:spcAft>
@@ -10162,17 +10486,53 @@
               </a:defRPr>
             </a:pPr>
             <a:r>
-              <a:t>   Open Quantum Safe (liboqs 0.10.0) + OpenSSL 3.x for cryptographic acceleration. Zero managed-runtime overhead — runs on embedded and server alike.</a:t>
-            </a:r>
-          </a:p>
-          <a:p>
-            <a:pPr algn="ctr">
+              <a:rPr sz="2400" b="1" dirty="0">
+                <a:latin typeface="Times New Roman" panose="02020603050405020304" pitchFamily="18" charset="0"/>
+                <a:cs typeface="Times New Roman" panose="02020603050405020304" pitchFamily="18" charset="0"/>
+              </a:rPr>
+              <a:t>• POSIX Multithreaded Pipeline: </a:t>
+            </a:r>
+            <a:r>
+              <a:rPr sz="2400" dirty="0">
+                <a:latin typeface="Times New Roman" panose="02020603050405020304" pitchFamily="18" charset="0"/>
+                <a:cs typeface="Times New Roman" panose="02020603050405020304" pitchFamily="18" charset="0"/>
+              </a:rPr>
+              <a:t>Worker thread pool decouples classical and post-quantum key generation, capping crypto execution time to max(</a:t>
+            </a:r>
+            <a:r>
+              <a:rPr sz="2400" dirty="0" err="1">
+                <a:latin typeface="Times New Roman" panose="02020603050405020304" pitchFamily="18" charset="0"/>
+                <a:cs typeface="Times New Roman" panose="02020603050405020304" pitchFamily="18" charset="0"/>
+              </a:rPr>
+              <a:t>T_classical</a:t>
+            </a:r>
+            <a:r>
+              <a:rPr sz="2400" dirty="0">
+                <a:latin typeface="Times New Roman" panose="02020603050405020304" pitchFamily="18" charset="0"/>
+                <a:cs typeface="Times New Roman" panose="02020603050405020304" pitchFamily="18" charset="0"/>
+              </a:rPr>
+              <a:t>, </a:t>
+            </a:r>
+            <a:r>
+              <a:rPr sz="2400" dirty="0" err="1">
+                <a:latin typeface="Times New Roman" panose="02020603050405020304" pitchFamily="18" charset="0"/>
+                <a:cs typeface="Times New Roman" panose="02020603050405020304" pitchFamily="18" charset="0"/>
+              </a:rPr>
+              <a:t>T_pqc</a:t>
+            </a:r>
+            <a:r>
+              <a:rPr sz="2400" dirty="0">
+                <a:latin typeface="Times New Roman" panose="02020603050405020304" pitchFamily="18" charset="0"/>
+                <a:cs typeface="Times New Roman" panose="02020603050405020304" pitchFamily="18" charset="0"/>
+              </a:rPr>
+              <a:t>).</a:t>
+            </a:r>
+          </a:p>
+          <a:p>
+            <a:pPr>
               <a:lnSpc>
-                <a:spcPts val="3079"/>
+                <a:spcPct val="150000"/>
               </a:lnSpc>
-              <a:spcBef>
-                <a:spcPct val="0"/>
-              </a:spcBef>
               <a:spcAft>
                 <a:spcPts val="1200"/>
               </a:spcAft>
@@ -10184,17 +10544,25 @@
               </a:defRPr>
             </a:pPr>
             <a:r>
-              <a:t/>
-            </a:r>
-          </a:p>
-          <a:p>
-            <a:pPr algn="ctr">
+              <a:rPr sz="2400" b="1" dirty="0">
+                <a:latin typeface="Times New Roman" panose="02020603050405020304" pitchFamily="18" charset="0"/>
+                <a:cs typeface="Times New Roman" panose="02020603050405020304" pitchFamily="18" charset="0"/>
+              </a:rPr>
+              <a:t>• Zero-Copy Adaptive Framing Subsystem: </a:t>
+            </a:r>
+            <a:r>
+              <a:rPr sz="2400" dirty="0">
+                <a:latin typeface="Times New Roman" panose="02020603050405020304" pitchFamily="18" charset="0"/>
+                <a:cs typeface="Times New Roman" panose="02020603050405020304" pitchFamily="18" charset="0"/>
+              </a:rPr>
+              <a:t>Length-prefixed framing dynamically fragments and reassembles variable-length PQC frames up to 4,096 bytes with strict boundary enforcement.</a:t>
+            </a:r>
+          </a:p>
+          <a:p>
+            <a:pPr>
               <a:lnSpc>
-                <a:spcPts val="3079"/>
+                <a:spcPct val="150000"/>
               </a:lnSpc>
-              <a:spcBef>
-                <a:spcPct val="0"/>
-              </a:spcBef>
               <a:spcAft>
                 <a:spcPts val="1200"/>
               </a:spcAft>
@@ -10206,17 +10574,25 @@
               </a:defRPr>
             </a:pPr>
             <a:r>
-              <a:t>▸ POSIX Multi-threaded Parallel KEM (Step 18-19)</a:t>
-            </a:r>
-          </a:p>
-          <a:p>
-            <a:pPr algn="ctr">
+              <a:rPr sz="2400" b="1" dirty="0">
+                <a:latin typeface="Times New Roman" panose="02020603050405020304" pitchFamily="18" charset="0"/>
+                <a:cs typeface="Times New Roman" panose="02020603050405020304" pitchFamily="18" charset="0"/>
+              </a:rPr>
+              <a:t>• Replay-Protected Wire Format: </a:t>
+            </a:r>
+            <a:r>
+              <a:rPr sz="2400" dirty="0">
+                <a:latin typeface="Times New Roman" panose="02020603050405020304" pitchFamily="18" charset="0"/>
+                <a:cs typeface="Times New Roman" panose="02020603050405020304" pitchFamily="18" charset="0"/>
+              </a:rPr>
+              <a:t>Wire structure [8B Monotonic Counter | 16B GCM Tag | Ciphertext] with AAD binding 'PQC_H365_CHANNEL_V1' and authenticated session teardown (QUIT).</a:t>
+            </a:r>
+          </a:p>
+          <a:p>
+            <a:pPr>
               <a:lnSpc>
-                <a:spcPts val="3079"/>
+                <a:spcPct val="150000"/>
               </a:lnSpc>
-              <a:spcBef>
-                <a:spcPct val="0"/>
-              </a:spcBef>
               <a:spcAft>
                 <a:spcPts val="1200"/>
               </a:spcAft>
@@ -10228,205 +10604,18 @@
               </a:defRPr>
             </a:pPr>
             <a:r>
-              <a:t>   X25519 and ML-KEM-768 execute concurrently via pthreads. SHA-256 HKDF combines both shared secrets into a single 32-byte session key.</a:t>
-            </a:r>
-          </a:p>
-          <a:p>
-            <a:pPr algn="ctr">
-              <a:lnSpc>
-                <a:spcPts val="3079"/>
-              </a:lnSpc>
-              <a:spcBef>
-                <a:spcPct val="0"/>
-              </a:spcBef>
-              <a:spcAft>
-                <a:spcPts val="1200"/>
-              </a:spcAft>
-              <a:defRPr sz="1800">
-                <a:solidFill>
-                  <a:srgbClr val="1E293B"/>
-                </a:solidFill>
-                <a:latin typeface="IBM Plex Sans"/>
-              </a:defRPr>
-            </a:pPr>
-            <a:r>
-              <a:t/>
-            </a:r>
-          </a:p>
-          <a:p>
-            <a:pPr algn="ctr">
-              <a:lnSpc>
-                <a:spcPts val="3079"/>
-              </a:lnSpc>
-              <a:spcBef>
-                <a:spcPct val="0"/>
-              </a:spcBef>
-              <a:spcAft>
-                <a:spcPts val="1200"/>
-              </a:spcAft>
-              <a:defRPr sz="1800">
-                <a:solidFill>
-                  <a:srgbClr val="1E293B"/>
-                </a:solidFill>
-                <a:latin typeface="IBM Plex Sans"/>
-              </a:defRPr>
-            </a:pPr>
-            <a:r>
-              <a:t>▸ Key Derivation: HKDF-SHA256</a:t>
-            </a:r>
-          </a:p>
-          <a:p>
-            <a:pPr algn="ctr">
-              <a:lnSpc>
-                <a:spcPts val="3079"/>
-              </a:lnSpc>
-              <a:spcBef>
-                <a:spcPct val="0"/>
-              </a:spcBef>
-              <a:spcAft>
-                <a:spcPts val="1200"/>
-              </a:spcAft>
-              <a:defRPr sz="1800">
-                <a:solidFill>
-                  <a:srgbClr val="1E293B"/>
-                </a:solidFill>
-                <a:latin typeface="IBM Plex Sans"/>
-              </a:defRPr>
-            </a:pPr>
-            <a:r>
-              <a:t>   HKDF(X25519_secret ‖ ML-KEM_secret) → 32-byte ChaCha20 key. Provides forward secrecy and domain separation.</a:t>
-            </a:r>
-          </a:p>
-          <a:p>
-            <a:pPr algn="ctr">
-              <a:lnSpc>
-                <a:spcPts val="3079"/>
-              </a:lnSpc>
-              <a:spcBef>
-                <a:spcPct val="0"/>
-              </a:spcBef>
-              <a:spcAft>
-                <a:spcPts val="1200"/>
-              </a:spcAft>
-              <a:defRPr sz="1800">
-                <a:solidFill>
-                  <a:srgbClr val="1E293B"/>
-                </a:solidFill>
-                <a:latin typeface="IBM Plex Sans"/>
-              </a:defRPr>
-            </a:pPr>
-            <a:r>
-              <a:t/>
-            </a:r>
-          </a:p>
-          <a:p>
-            <a:pPr algn="ctr">
-              <a:lnSpc>
-                <a:spcPts val="3079"/>
-              </a:lnSpc>
-              <a:spcBef>
-                <a:spcPct val="0"/>
-              </a:spcBef>
-              <a:spcAft>
-                <a:spcPts val="1200"/>
-              </a:spcAft>
-              <a:defRPr sz="1800">
-                <a:solidFill>
-                  <a:srgbClr val="1E293B"/>
-                </a:solidFill>
-                <a:latin typeface="IBM Plex Sans"/>
-              </a:defRPr>
-            </a:pPr>
-            <a:r>
-              <a:t>▸ Authenticated Channel: ChaCha20-Poly1305 (Step 26-28)</a:t>
-            </a:r>
-          </a:p>
-          <a:p>
-            <a:pPr algn="ctr">
-              <a:lnSpc>
-                <a:spcPts val="3079"/>
-              </a:lnSpc>
-              <a:spcBef>
-                <a:spcPct val="0"/>
-              </a:spcBef>
-              <a:spcAft>
-                <a:spcPts val="1200"/>
-              </a:spcAft>
-              <a:defRPr sz="1800">
-                <a:solidFill>
-                  <a:srgbClr val="1E293B"/>
-                </a:solidFill>
-                <a:latin typeface="IBM Plex Sans"/>
-              </a:defRPr>
-            </a:pPr>
-            <a:r>
-              <a:t>   All channel messages encrypted with AEAD. 12-byte nonce derived from monotonic counter + random salt. Replay attacks blocked by counter check.</a:t>
-            </a:r>
-          </a:p>
-          <a:p>
-            <a:pPr algn="ctr">
-              <a:lnSpc>
-                <a:spcPts val="3079"/>
-              </a:lnSpc>
-              <a:spcBef>
-                <a:spcPct val="0"/>
-              </a:spcBef>
-              <a:spcAft>
-                <a:spcPts val="1200"/>
-              </a:spcAft>
-              <a:defRPr sz="1800">
-                <a:solidFill>
-                  <a:srgbClr val="1E293B"/>
-                </a:solidFill>
-                <a:latin typeface="IBM Plex Sans"/>
-              </a:defRPr>
-            </a:pPr>
-            <a:r>
-              <a:t/>
-            </a:r>
-          </a:p>
-          <a:p>
-            <a:pPr algn="ctr">
-              <a:lnSpc>
-                <a:spcPts val="3079"/>
-              </a:lnSpc>
-              <a:spcBef>
-                <a:spcPct val="0"/>
-              </a:spcBef>
-              <a:spcAft>
-                <a:spcPts val="1200"/>
-              </a:spcAft>
-              <a:defRPr sz="1800">
-                <a:solidFill>
-                  <a:srgbClr val="1E293B"/>
-                </a:solidFill>
-                <a:latin typeface="IBM Plex Sans"/>
-              </a:defRPr>
-            </a:pPr>
-            <a:r>
-              <a:t>▸ Build System: CMake 3.20 + Ninja</a:t>
-            </a:r>
-          </a:p>
-          <a:p>
-            <a:pPr algn="ctr">
-              <a:lnSpc>
-                <a:spcPts val="3079"/>
-              </a:lnSpc>
-              <a:spcBef>
-                <a:spcPct val="0"/>
-              </a:spcBef>
-              <a:spcAft>
-                <a:spcPts val="1200"/>
-              </a:spcAft>
-              <a:defRPr sz="1800">
-                <a:solidFill>
-                  <a:srgbClr val="1E293B"/>
-                </a:solidFill>
-                <a:latin typeface="IBM Plex Sans"/>
-              </a:defRPr>
-            </a:pPr>
-            <a:r>
-              <a:t>   Targets: pqc_vpn (VPN handshake), pqc_channel_server, pqc_channel_client (multi-message channel). Cross-platform Linux/macOS.</a:t>
+              <a:rPr sz="2400" b="1" dirty="0">
+                <a:latin typeface="Times New Roman" panose="02020603050405020304" pitchFamily="18" charset="0"/>
+                <a:cs typeface="Times New Roman" panose="02020603050405020304" pitchFamily="18" charset="0"/>
+              </a:rPr>
+              <a:t>• Linux Network Integration: </a:t>
+            </a:r>
+            <a:r>
+              <a:rPr sz="2400" dirty="0">
+                <a:latin typeface="Times New Roman" panose="02020603050405020304" pitchFamily="18" charset="0"/>
+                <a:cs typeface="Times New Roman" panose="02020603050405020304" pitchFamily="18" charset="0"/>
+              </a:rPr>
+              <a:t>Verified across Linux network interfaces (Ubuntu Server VM) with shared memory architecture and automated telemetry.</a:t>
             </a:r>
           </a:p>
         </p:txBody>
@@ -10470,7 +10659,7 @@
             </a:pathLst>
           </a:custGeom>
           <a:blipFill>
-            <a:blip r:embed="rId6"/>
+            <a:blip r:embed="rId7"/>
             <a:stretch>
               <a:fillRect/>
             </a:stretch>
@@ -11111,35 +11300,8 @@
         </p:nvSpPr>
         <p:spPr>
           <a:xfrm>
-            <a:off x="7362389" y="1945514"/>
-            <a:ext cx="2915245" cy="953338"/>
-          </a:xfrm>
-          <a:prstGeom prst="rect">
-            <a:avLst/>
-          </a:prstGeom>
-        </p:spPr>
-        <p:txBody>
-          <a:bodyPr lIns="0" tIns="0" rIns="0" bIns="0" rtlCol="0" anchor="t">
-            <a:spAutoFit/>
-          </a:bodyPr>
-          <a:lstStyle/>
-          <a:p>
-            <a:r>
-              <a:t>MINIMAL WORKING PROTOTYPE</a:t>
-            </a:r>
-          </a:p>
-        </p:txBody>
-      </p:sp>
-      <p:sp>
-        <p:nvSpPr>
-          <p:cNvPr id="23" name="TextBox 23"/>
-          <p:cNvSpPr txBox="1"/>
-          <p:nvPr/>
-        </p:nvSpPr>
-        <p:spPr>
-          <a:xfrm>
-            <a:off x="2200513" y="4839970"/>
-            <a:ext cx="13886974" cy="3867725"/>
+            <a:off x="6053028" y="2100226"/>
+            <a:ext cx="5058211" cy="500137"/>
           </a:xfrm>
           <a:prstGeom prst="rect">
             <a:avLst/>
@@ -11153,7 +11315,51 @@
           <a:p>
             <a:pPr algn="ctr">
               <a:lnSpc>
-                <a:spcPts val="3219"/>
+                <a:spcPts val="3919"/>
+              </a:lnSpc>
+              <a:spcBef>
+                <a:spcPct val="0"/>
+              </a:spcBef>
+            </a:pPr>
+            <a:r>
+              <a:rPr lang="en-US" sz="3600" b="1" dirty="0">
+                <a:solidFill>
+                  <a:srgbClr val="000000"/>
+                </a:solidFill>
+                <a:latin typeface="IBM Plex Sans"/>
+                <a:ea typeface="IBM Plex Sans"/>
+                <a:cs typeface="IBM Plex Sans"/>
+                <a:sym typeface="IBM Plex Sans"/>
+              </a:rPr>
+              <a:t>MINIMAL PROTOTYPE</a:t>
+            </a:r>
+          </a:p>
+        </p:txBody>
+      </p:sp>
+      <p:sp>
+        <p:nvSpPr>
+          <p:cNvPr id="23" name="TextBox 23"/>
+          <p:cNvSpPr txBox="1"/>
+          <p:nvPr/>
+        </p:nvSpPr>
+        <p:spPr>
+          <a:xfrm>
+            <a:off x="1887959" y="3051999"/>
+            <a:ext cx="13886974" cy="6258445"/>
+          </a:xfrm>
+          <a:prstGeom prst="rect">
+            <a:avLst/>
+          </a:prstGeom>
+        </p:spPr>
+        <p:txBody>
+          <a:bodyPr wrap="square" lIns="0" tIns="0" rIns="0" bIns="0" rtlCol="0" anchor="t">
+            <a:spAutoFit/>
+          </a:bodyPr>
+          <a:lstStyle/>
+          <a:p>
+            <a:pPr>
+              <a:lnSpc>
+                <a:spcPct val="200000"/>
               </a:lnSpc>
               <a:spcBef>
                 <a:spcPct val="0"/>
@@ -11169,17 +11375,39 @@
               </a:defRPr>
             </a:pPr>
             <a:r>
-              <a:t>▸ Full Working Codebase — Open-Sourced</a:t>
-            </a:r>
-          </a:p>
-          <a:p>
-            <a:pPr algn="ctr">
+              <a:rPr sz="2400" b="1" dirty="0">
+                <a:latin typeface="Times New Roman" panose="02020603050405020304" pitchFamily="18" charset="0"/>
+                <a:cs typeface="Times New Roman" panose="02020603050405020304" pitchFamily="18" charset="0"/>
+              </a:rPr>
+              <a:t>• Full Working Codebase: </a:t>
+            </a:r>
+            <a:r>
+              <a:rPr sz="2400" dirty="0">
+                <a:latin typeface="Times New Roman" panose="02020603050405020304" pitchFamily="18" charset="0"/>
+                <a:cs typeface="Times New Roman" panose="02020603050405020304" pitchFamily="18" charset="0"/>
+              </a:rPr>
+              <a:t>Published and open-sourced at https://github.com/chipashacosmas/PQC-H365 with complete C source, </a:t>
+            </a:r>
+            <a:r>
+              <a:rPr sz="2400" dirty="0" err="1">
+                <a:latin typeface="Times New Roman" panose="02020603050405020304" pitchFamily="18" charset="0"/>
+                <a:cs typeface="Times New Roman" panose="02020603050405020304" pitchFamily="18" charset="0"/>
+              </a:rPr>
+              <a:t>CMake</a:t>
+            </a:r>
+            <a:r>
+              <a:rPr sz="2400" dirty="0">
+                <a:latin typeface="Times New Roman" panose="02020603050405020304" pitchFamily="18" charset="0"/>
+                <a:cs typeface="Times New Roman" panose="02020603050405020304" pitchFamily="18" charset="0"/>
+              </a:rPr>
+              <a:t>/Ninja build manifest, and automated test scripts.</a:t>
+            </a:r>
+          </a:p>
+          <a:p>
+            <a:pPr>
               <a:lnSpc>
-                <a:spcPts val="3219"/>
+                <a:spcPct val="200000"/>
               </a:lnSpc>
-              <a:spcBef>
-                <a:spcPct val="0"/>
-              </a:spcBef>
               <a:spcAft>
                 <a:spcPts val="1200"/>
               </a:spcAft>
@@ -11191,17 +11419,130 @@
               </a:defRPr>
             </a:pPr>
             <a:r>
-              <a:t>   github.com/chipashacosmas/PQC-H365</a:t>
-            </a:r>
-          </a:p>
-          <a:p>
-            <a:pPr algn="ctr">
+              <a:rPr sz="2400" dirty="0">
+                <a:latin typeface="Times New Roman" panose="02020603050405020304" pitchFamily="18" charset="0"/>
+                <a:cs typeface="Times New Roman" panose="02020603050405020304" pitchFamily="18" charset="0"/>
+              </a:rPr>
+              <a:t>• Standalone KAT tests (</a:t>
+            </a:r>
+            <a:r>
+              <a:rPr sz="2400" dirty="0" err="1">
+                <a:latin typeface="Times New Roman" panose="02020603050405020304" pitchFamily="18" charset="0"/>
+                <a:cs typeface="Times New Roman" panose="02020603050405020304" pitchFamily="18" charset="0"/>
+              </a:rPr>
+              <a:t>check_liboqs</a:t>
+            </a:r>
+            <a:r>
+              <a:rPr sz="2400" dirty="0">
+                <a:latin typeface="Times New Roman" panose="02020603050405020304" pitchFamily="18" charset="0"/>
+                <a:cs typeface="Times New Roman" panose="02020603050405020304" pitchFamily="18" charset="0"/>
+              </a:rPr>
+              <a:t>, </a:t>
+            </a:r>
+            <a:r>
+              <a:rPr sz="2400" dirty="0" err="1">
+                <a:latin typeface="Times New Roman" panose="02020603050405020304" pitchFamily="18" charset="0"/>
+                <a:cs typeface="Times New Roman" panose="02020603050405020304" pitchFamily="18" charset="0"/>
+              </a:rPr>
+              <a:t>test_ml_kem</a:t>
+            </a:r>
+            <a:r>
+              <a:rPr sz="2400" dirty="0">
+                <a:latin typeface="Times New Roman" panose="02020603050405020304" pitchFamily="18" charset="0"/>
+                <a:cs typeface="Times New Roman" panose="02020603050405020304" pitchFamily="18" charset="0"/>
+              </a:rPr>
+              <a:t>, </a:t>
+            </a:r>
+            <a:r>
+              <a:rPr sz="2400" dirty="0" err="1">
+                <a:latin typeface="Times New Roman" panose="02020603050405020304" pitchFamily="18" charset="0"/>
+                <a:cs typeface="Times New Roman" panose="02020603050405020304" pitchFamily="18" charset="0"/>
+              </a:rPr>
+              <a:t>test_ml_dsa</a:t>
+            </a:r>
+            <a:r>
+              <a:rPr sz="2400" dirty="0">
+                <a:latin typeface="Times New Roman" panose="02020603050405020304" pitchFamily="18" charset="0"/>
+                <a:cs typeface="Times New Roman" panose="02020603050405020304" pitchFamily="18" charset="0"/>
+              </a:rPr>
+              <a:t>, test_x25519, </a:t>
+            </a:r>
+            <a:r>
+              <a:rPr sz="2400" dirty="0" err="1">
+                <a:latin typeface="Times New Roman" panose="02020603050405020304" pitchFamily="18" charset="0"/>
+                <a:cs typeface="Times New Roman" panose="02020603050405020304" pitchFamily="18" charset="0"/>
+              </a:rPr>
+              <a:t>test_hybrid_kdf</a:t>
+            </a:r>
+            <a:r>
+              <a:rPr sz="2400" dirty="0">
+                <a:latin typeface="Times New Roman" panose="02020603050405020304" pitchFamily="18" charset="0"/>
+                <a:cs typeface="Times New Roman" panose="02020603050405020304" pitchFamily="18" charset="0"/>
+              </a:rPr>
+              <a:t>) and network binaries (</a:t>
+            </a:r>
+            <a:r>
+              <a:rPr sz="2400" dirty="0" err="1">
+                <a:latin typeface="Times New Roman" panose="02020603050405020304" pitchFamily="18" charset="0"/>
+                <a:cs typeface="Times New Roman" panose="02020603050405020304" pitchFamily="18" charset="0"/>
+              </a:rPr>
+              <a:t>pqc_kem</a:t>
+            </a:r>
+            <a:r>
+              <a:rPr sz="2400" dirty="0">
+                <a:latin typeface="Times New Roman" panose="02020603050405020304" pitchFamily="18" charset="0"/>
+                <a:cs typeface="Times New Roman" panose="02020603050405020304" pitchFamily="18" charset="0"/>
+              </a:rPr>
+              <a:t>, </a:t>
+            </a:r>
+            <a:r>
+              <a:rPr sz="2400" dirty="0" err="1">
+                <a:latin typeface="Times New Roman" panose="02020603050405020304" pitchFamily="18" charset="0"/>
+                <a:cs typeface="Times New Roman" panose="02020603050405020304" pitchFamily="18" charset="0"/>
+              </a:rPr>
+              <a:t>pqc_hybrid_seq</a:t>
+            </a:r>
+            <a:r>
+              <a:rPr sz="2400" dirty="0">
+                <a:latin typeface="Times New Roman" panose="02020603050405020304" pitchFamily="18" charset="0"/>
+                <a:cs typeface="Times New Roman" panose="02020603050405020304" pitchFamily="18" charset="0"/>
+              </a:rPr>
+              <a:t>, </a:t>
+            </a:r>
+            <a:r>
+              <a:rPr sz="2400" dirty="0" err="1">
+                <a:latin typeface="Times New Roman" panose="02020603050405020304" pitchFamily="18" charset="0"/>
+                <a:cs typeface="Times New Roman" panose="02020603050405020304" pitchFamily="18" charset="0"/>
+              </a:rPr>
+              <a:t>pqc_hybrid_par</a:t>
+            </a:r>
+            <a:r>
+              <a:rPr sz="2400" dirty="0">
+                <a:latin typeface="Times New Roman" panose="02020603050405020304" pitchFamily="18" charset="0"/>
+                <a:cs typeface="Times New Roman" panose="02020603050405020304" pitchFamily="18" charset="0"/>
+              </a:rPr>
+              <a:t>, </a:t>
+            </a:r>
+            <a:r>
+              <a:rPr sz="2400" dirty="0" err="1">
+                <a:latin typeface="Times New Roman" panose="02020603050405020304" pitchFamily="18" charset="0"/>
+                <a:cs typeface="Times New Roman" panose="02020603050405020304" pitchFamily="18" charset="0"/>
+              </a:rPr>
+              <a:t>pqc_channel</a:t>
+            </a:r>
+            <a:r>
+              <a:rPr sz="2400" dirty="0">
+                <a:latin typeface="Times New Roman" panose="02020603050405020304" pitchFamily="18" charset="0"/>
+                <a:cs typeface="Times New Roman" panose="02020603050405020304" pitchFamily="18" charset="0"/>
+              </a:rPr>
+              <a:t>).</a:t>
+            </a:r>
+          </a:p>
+          <a:p>
+            <a:pPr>
               <a:lnSpc>
-                <a:spcPts val="3219"/>
+                <a:spcPct val="200000"/>
               </a:lnSpc>
-              <a:spcBef>
-                <a:spcPct val="0"/>
-              </a:spcBef>
               <a:spcAft>
                 <a:spcPts val="1200"/>
               </a:spcAft>
@@ -11213,17 +11554,53 @@
               </a:defRPr>
             </a:pPr>
             <a:r>
-              <a:t>   Complete C source, CMake/Ninja build manifest, liboqs 0.10.0 integration, unit test suite, and CI-ready Dockerfile.</a:t>
-            </a:r>
-          </a:p>
-          <a:p>
-            <a:pPr algn="ctr">
+              <a:rPr sz="2400" dirty="0">
+                <a:latin typeface="Times New Roman" panose="02020603050405020304" pitchFamily="18" charset="0"/>
+                <a:cs typeface="Times New Roman" panose="02020603050405020304" pitchFamily="18" charset="0"/>
+              </a:rPr>
+              <a:t>• </a:t>
+            </a:r>
+            <a:r>
+              <a:rPr sz="2400" b="1" dirty="0">
+                <a:latin typeface="Times New Roman" panose="02020603050405020304" pitchFamily="18" charset="0"/>
+                <a:cs typeface="Times New Roman" panose="02020603050405020304" pitchFamily="18" charset="0"/>
+              </a:rPr>
+              <a:t>Interactive Multi-Message Channel: </a:t>
+            </a:r>
+            <a:r>
+              <a:rPr sz="2400" dirty="0" err="1">
+                <a:latin typeface="Times New Roman" panose="02020603050405020304" pitchFamily="18" charset="0"/>
+                <a:cs typeface="Times New Roman" panose="02020603050405020304" pitchFamily="18" charset="0"/>
+              </a:rPr>
+              <a:t>pqc_channel_server</a:t>
+            </a:r>
+            <a:r>
+              <a:rPr sz="2400" dirty="0">
+                <a:latin typeface="Times New Roman" panose="02020603050405020304" pitchFamily="18" charset="0"/>
+                <a:cs typeface="Times New Roman" panose="02020603050405020304" pitchFamily="18" charset="0"/>
+              </a:rPr>
+              <a:t> &amp; </a:t>
+            </a:r>
+            <a:r>
+              <a:rPr sz="2400" dirty="0" err="1">
+                <a:latin typeface="Times New Roman" panose="02020603050405020304" pitchFamily="18" charset="0"/>
+                <a:cs typeface="Times New Roman" panose="02020603050405020304" pitchFamily="18" charset="0"/>
+              </a:rPr>
+              <a:t>pqc_channel_client</a:t>
+            </a:r>
+            <a:r>
+              <a:rPr sz="2400" dirty="0">
+                <a:latin typeface="Times New Roman" panose="02020603050405020304" pitchFamily="18" charset="0"/>
+                <a:cs typeface="Times New Roman" panose="02020603050405020304" pitchFamily="18" charset="0"/>
+              </a:rPr>
+              <a:t> executing live hybrid handshakes, verified ML-DSA-65 signatures, monotonic counter increments, and encrypted messaging.</a:t>
+            </a:r>
+          </a:p>
+          <a:p>
+            <a:pPr>
               <a:lnSpc>
-                <a:spcPts val="3219"/>
+                <a:spcPct val="200000"/>
               </a:lnSpc>
-              <a:spcBef>
-                <a:spcPct val="0"/>
-              </a:spcBef>
               <a:spcAft>
                 <a:spcPts val="1200"/>
               </a:spcAft>
@@ -11235,294 +11612,30 @@
               </a:defRPr>
             </a:pPr>
             <a:r>
-              <a:t/>
-            </a:r>
-          </a:p>
-          <a:p>
-            <a:pPr algn="ctr">
-              <a:lnSpc>
-                <a:spcPts val="3219"/>
-              </a:lnSpc>
-              <a:spcBef>
-                <a:spcPct val="0"/>
-              </a:spcBef>
-              <a:spcAft>
-                <a:spcPts val="1200"/>
-              </a:spcAft>
-              <a:defRPr sz="1900">
-                <a:solidFill>
-                  <a:srgbClr val="1E293B"/>
-                </a:solidFill>
-                <a:latin typeface="IBM Plex Sans"/>
-              </a:defRPr>
-            </a:pPr>
-            <a:r>
-              <a:t>▸ What Has Been Built &amp; Verified (Steps 1–28)</a:t>
-            </a:r>
-          </a:p>
-          <a:p>
-            <a:pPr algn="ctr">
-              <a:lnSpc>
-                <a:spcPts val="3219"/>
-              </a:lnSpc>
-              <a:spcBef>
-                <a:spcPct val="0"/>
-              </a:spcBef>
-              <a:spcAft>
-                <a:spcPts val="1200"/>
-              </a:spcAft>
-              <a:defRPr sz="1900">
-                <a:solidFill>
-                  <a:srgbClr val="1E293B"/>
-                </a:solidFill>
-                <a:latin typeface="IBM Plex Sans"/>
-              </a:defRPr>
-            </a:pPr>
-            <a:r>
-              <a:t>   Step 1-5:   Project scaffold, liboqs build, OpenSSL integration</a:t>
-            </a:r>
-          </a:p>
-          <a:p>
-            <a:pPr algn="ctr">
-              <a:lnSpc>
-                <a:spcPts val="3219"/>
-              </a:lnSpc>
-              <a:spcBef>
-                <a:spcPct val="0"/>
-              </a:spcBef>
-              <a:spcAft>
-                <a:spcPts val="1200"/>
-              </a:spcAft>
-              <a:defRPr sz="1900">
-                <a:solidFill>
-                  <a:srgbClr val="1E293B"/>
-                </a:solidFill>
-                <a:latin typeface="IBM Plex Sans"/>
-              </a:defRPr>
-            </a:pPr>
-            <a:r>
-              <a:t>   Step 6-10:  ML-KEM-768 KEM, X25519 ECDH, ChaCha20-Poly1305 AEAD</a:t>
-            </a:r>
-          </a:p>
-          <a:p>
-            <a:pPr algn="ctr">
-              <a:lnSpc>
-                <a:spcPts val="3219"/>
-              </a:lnSpc>
-              <a:spcBef>
-                <a:spcPct val="0"/>
-              </a:spcBef>
-              <a:spcAft>
-                <a:spcPts val="1200"/>
-              </a:spcAft>
-              <a:defRPr sz="1900">
-                <a:solidFill>
-                  <a:srgbClr val="1E293B"/>
-                </a:solidFill>
-                <a:latin typeface="IBM Plex Sans"/>
-              </a:defRPr>
-            </a:pPr>
-            <a:r>
-              <a:t>   Step 11-15: VPN handshake protocol, TCP session management</a:t>
-            </a:r>
-          </a:p>
-          <a:p>
-            <a:pPr algn="ctr">
-              <a:lnSpc>
-                <a:spcPts val="3219"/>
-              </a:lnSpc>
-              <a:spcBef>
-                <a:spcPct val="0"/>
-              </a:spcBef>
-              <a:spcAft>
-                <a:spcPts val="1200"/>
-              </a:spcAft>
-              <a:defRPr sz="1900">
-                <a:solidFill>
-                  <a:srgbClr val="1E293B"/>
-                </a:solidFill>
-                <a:latin typeface="IBM Plex Sans"/>
-              </a:defRPr>
-            </a:pPr>
-            <a:r>
-              <a:t>   Step 16-20: Parallel KEM execution (pthreads), 20-run benchmark suite</a:t>
-            </a:r>
-          </a:p>
-          <a:p>
-            <a:pPr algn="ctr">
-              <a:lnSpc>
-                <a:spcPts val="3219"/>
-              </a:lnSpc>
-              <a:spcBef>
-                <a:spcPct val="0"/>
-              </a:spcBef>
-              <a:spcAft>
-                <a:spcPts val="1200"/>
-              </a:spcAft>
-              <a:defRPr sz="1900">
-                <a:solidFill>
-                  <a:srgbClr val="1E293B"/>
-                </a:solidFill>
-                <a:latin typeface="IBM Plex Sans"/>
-              </a:defRPr>
-            </a:pPr>
-            <a:r>
-              <a:t>   Step 21-25: Key derivation (HKDF-SHA256), network stack integration</a:t>
-            </a:r>
-          </a:p>
-          <a:p>
-            <a:pPr algn="ctr">
-              <a:lnSpc>
-                <a:spcPts val="3219"/>
-              </a:lnSpc>
-              <a:spcBef>
-                <a:spcPct val="0"/>
-              </a:spcBef>
-              <a:spcAft>
-                <a:spcPts val="1200"/>
-              </a:spcAft>
-              <a:defRPr sz="1900">
-                <a:solidFill>
-                  <a:srgbClr val="1E293B"/>
-                </a:solidFill>
-                <a:latin typeface="IBM Plex Sans"/>
-              </a:defRPr>
-            </a:pPr>
-            <a:r>
-              <a:t>   Step 26-28: Multi-message secure channel with replay protection (LIVE)</a:t>
-            </a:r>
-          </a:p>
-          <a:p>
-            <a:pPr algn="ctr">
-              <a:lnSpc>
-                <a:spcPts val="3219"/>
-              </a:lnSpc>
-              <a:spcBef>
-                <a:spcPct val="0"/>
-              </a:spcBef>
-              <a:spcAft>
-                <a:spcPts val="1200"/>
-              </a:spcAft>
-              <a:defRPr sz="1900">
-                <a:solidFill>
-                  <a:srgbClr val="1E293B"/>
-                </a:solidFill>
-                <a:latin typeface="IBM Plex Sans"/>
-              </a:defRPr>
-            </a:pPr>
-            <a:r>
-              <a:t/>
-            </a:r>
-          </a:p>
-          <a:p>
-            <a:pPr algn="ctr">
-              <a:lnSpc>
-                <a:spcPts val="3219"/>
-              </a:lnSpc>
-              <a:spcBef>
-                <a:spcPct val="0"/>
-              </a:spcBef>
-              <a:spcAft>
-                <a:spcPts val="1200"/>
-              </a:spcAft>
-              <a:defRPr sz="1900">
-                <a:solidFill>
-                  <a:srgbClr val="1E293B"/>
-                </a:solidFill>
-                <a:latin typeface="IBM Plex Sans"/>
-              </a:defRPr>
-            </a:pPr>
-            <a:r>
-              <a:t>▸ Demo-Ready Right Now</a:t>
-            </a:r>
-          </a:p>
-          <a:p>
-            <a:pPr algn="ctr">
-              <a:lnSpc>
-                <a:spcPts val="3219"/>
-              </a:lnSpc>
-              <a:spcBef>
-                <a:spcPct val="0"/>
-              </a:spcBef>
-              <a:spcAft>
-                <a:spcPts val="1200"/>
-              </a:spcAft>
-              <a:defRPr sz="1900">
-                <a:solidFill>
-                  <a:srgbClr val="1E293B"/>
-                </a:solidFill>
-                <a:latin typeface="IBM Plex Sans"/>
-              </a:defRPr>
-            </a:pPr>
-            <a:r>
-              <a:t>   Build: cmake -B build -G Ninja &amp;&amp; ninja -C build</a:t>
-            </a:r>
-          </a:p>
-          <a:p>
-            <a:pPr algn="ctr">
-              <a:lnSpc>
-                <a:spcPts val="3219"/>
-              </a:lnSpc>
-              <a:spcBef>
-                <a:spcPct val="0"/>
-              </a:spcBef>
-              <a:spcAft>
-                <a:spcPts val="1200"/>
-              </a:spcAft>
-              <a:defRPr sz="1900">
-                <a:solidFill>
-                  <a:srgbClr val="1E293B"/>
-                </a:solidFill>
-                <a:latin typeface="IBM Plex Sans"/>
-              </a:defRPr>
-            </a:pPr>
-            <a:r>
-              <a:t>   Server: ./pqc_channel_server 9000</a:t>
-            </a:r>
-          </a:p>
-          <a:p>
-            <a:pPr algn="ctr">
-              <a:lnSpc>
-                <a:spcPts val="3219"/>
-              </a:lnSpc>
-              <a:spcBef>
-                <a:spcPct val="0"/>
-              </a:spcBef>
-              <a:spcAft>
-                <a:spcPts val="1200"/>
-              </a:spcAft>
-              <a:defRPr sz="1900">
-                <a:solidFill>
-                  <a:srgbClr val="1E293B"/>
-                </a:solidFill>
-                <a:latin typeface="IBM Plex Sans"/>
-              </a:defRPr>
-            </a:pPr>
-            <a:r>
-              <a:t>   Client: ./pqc_channel_client 127.0.0.1 9000</a:t>
-            </a:r>
-          </a:p>
-          <a:p>
-            <a:pPr algn="ctr">
-              <a:lnSpc>
-                <a:spcPts val="3219"/>
-              </a:lnSpc>
-              <a:spcBef>
-                <a:spcPct val="0"/>
-              </a:spcBef>
-              <a:spcAft>
-                <a:spcPts val="1200"/>
-              </a:spcAft>
-              <a:defRPr sz="1900">
-                <a:solidFill>
-                  <a:srgbClr val="1E293B"/>
-                </a:solidFill>
-                <a:latin typeface="IBM Plex Sans"/>
-              </a:defRPr>
-            </a:pPr>
-            <a:r>
-              <a:t>   Full quantum-resistant handshake + encrypted channel exchange verified.</a:t>
-            </a:r>
+              <a:rPr sz="2400" b="1" dirty="0">
+                <a:latin typeface="Times New Roman" panose="02020603050405020304" pitchFamily="18" charset="0"/>
+                <a:cs typeface="Times New Roman" panose="02020603050405020304" pitchFamily="18" charset="0"/>
+              </a:rPr>
+              <a:t>• Automated Regression Test Runner: </a:t>
+            </a:r>
+            <a:r>
+              <a:rPr sz="2400" dirty="0">
+                <a:latin typeface="Times New Roman" panose="02020603050405020304" pitchFamily="18" charset="0"/>
+                <a:cs typeface="Times New Roman" panose="02020603050405020304" pitchFamily="18" charset="0"/>
+              </a:rPr>
+              <a:t>./scripts/run_all_tests.sh executing all unit, framing, and network socket tests with a 100% pass rate.</a:t>
+            </a:r>
+            <a:r>
+              <a:rPr lang="en-US" sz="2400" dirty="0">
+                <a:latin typeface="Times New Roman" panose="02020603050405020304" pitchFamily="18" charset="0"/>
+                <a:cs typeface="Times New Roman" panose="02020603050405020304" pitchFamily="18" charset="0"/>
+              </a:rPr>
+              <a:t> Complete Suite of Executables: </a:t>
+            </a:r>
+            <a:endParaRPr sz="2400" dirty="0">
+              <a:latin typeface="Times New Roman" panose="02020603050405020304" pitchFamily="18" charset="0"/>
+              <a:cs typeface="Times New Roman" panose="02020603050405020304" pitchFamily="18" charset="0"/>
+            </a:endParaRPr>
           </a:p>
         </p:txBody>
       </p:sp>
@@ -12267,35 +12380,8 @@
         </p:nvSpPr>
         <p:spPr>
           <a:xfrm>
-            <a:off x="7550865" y="1969009"/>
-            <a:ext cx="2641044" cy="844398"/>
-          </a:xfrm>
-          <a:prstGeom prst="rect">
-            <a:avLst/>
-          </a:prstGeom>
-        </p:spPr>
-        <p:txBody>
-          <a:bodyPr lIns="0" tIns="0" rIns="0" bIns="0" rtlCol="0" anchor="t">
-            <a:spAutoFit/>
-          </a:bodyPr>
-          <a:lstStyle/>
-          <a:p>
-            <a:r>
-              <a:t>RESULTS &amp; VALIDATION</a:t>
-            </a:r>
-          </a:p>
-        </p:txBody>
-      </p:sp>
-      <p:sp>
-        <p:nvSpPr>
-          <p:cNvPr id="25" name="TextBox 25"/>
-          <p:cNvSpPr txBox="1"/>
-          <p:nvPr/>
-        </p:nvSpPr>
-        <p:spPr>
-          <a:xfrm>
-            <a:off x="2098357" y="4278023"/>
-            <a:ext cx="14015085" cy="3793346"/>
+            <a:off x="6656115" y="2005673"/>
+            <a:ext cx="4260135" cy="418191"/>
           </a:xfrm>
           <a:prstGeom prst="rect">
             <a:avLst/>
@@ -12309,7 +12395,51 @@
           <a:p>
             <a:pPr algn="ctr">
               <a:lnSpc>
-                <a:spcPts val="2939"/>
+                <a:spcPts val="3359"/>
+              </a:lnSpc>
+              <a:spcBef>
+                <a:spcPct val="0"/>
+              </a:spcBef>
+            </a:pPr>
+            <a:r>
+              <a:rPr lang="en-US" sz="2800" b="1" dirty="0">
+                <a:solidFill>
+                  <a:srgbClr val="000000"/>
+                </a:solidFill>
+                <a:latin typeface="Times New Roman" panose="02020603050405020304" pitchFamily="18" charset="0"/>
+                <a:ea typeface="IBM Plex Sans"/>
+                <a:cs typeface="Times New Roman" panose="02020603050405020304" pitchFamily="18" charset="0"/>
+                <a:sym typeface="IBM Plex Sans"/>
+              </a:rPr>
+              <a:t>RESULTS / VALIDATION</a:t>
+            </a:r>
+          </a:p>
+        </p:txBody>
+      </p:sp>
+      <p:sp>
+        <p:nvSpPr>
+          <p:cNvPr id="25" name="TextBox 25"/>
+          <p:cNvSpPr txBox="1"/>
+          <p:nvPr/>
+        </p:nvSpPr>
+        <p:spPr>
+          <a:xfrm>
+            <a:off x="2180235" y="3320017"/>
+            <a:ext cx="14015085" cy="5387244"/>
+          </a:xfrm>
+          <a:prstGeom prst="rect">
+            <a:avLst/>
+          </a:prstGeom>
+        </p:spPr>
+        <p:txBody>
+          <a:bodyPr wrap="square" lIns="0" tIns="0" rIns="0" bIns="0" rtlCol="0" anchor="t">
+            <a:spAutoFit/>
+          </a:bodyPr>
+          <a:lstStyle/>
+          <a:p>
+            <a:pPr>
+              <a:lnSpc>
+                <a:spcPct val="150000"/>
               </a:lnSpc>
               <a:spcAft>
                 <a:spcPts val="1200"/>
@@ -12322,13 +12452,66 @@
               </a:defRPr>
             </a:pPr>
             <a:r>
-              <a:t>▸ Empirical 20-Run Benchmark (Step 20 — Live Verified)</a:t>
-            </a:r>
-          </a:p>
-          <a:p>
-            <a:pPr algn="ctr">
+              <a:rPr sz="2400" b="1" dirty="0"/>
+              <a:t>• Empirical 20-Run Benchmark Findings: </a:t>
+            </a:r>
+            <a:r>
+              <a:rPr sz="2400" dirty="0"/>
+              <a:t>Classical X25519: 1.56 </a:t>
+            </a:r>
+            <a:r>
+              <a:rPr sz="2400" dirty="0" err="1"/>
+              <a:t>ms</a:t>
+            </a:r>
+            <a:r>
+              <a:rPr sz="2400" dirty="0"/>
+              <a:t> | ML-KEM-768: 8.43 </a:t>
+            </a:r>
+            <a:r>
+              <a:rPr sz="2400" dirty="0" err="1"/>
+              <a:t>ms</a:t>
+            </a:r>
+            <a:r>
+              <a:rPr sz="2400" dirty="0"/>
+              <a:t> | Sequential Hybrid: 55.56 </a:t>
+            </a:r>
+            <a:r>
+              <a:rPr sz="2400" dirty="0" err="1"/>
+              <a:t>ms</a:t>
+            </a:r>
+            <a:r>
+              <a:rPr sz="2400" dirty="0"/>
+              <a:t> client / 56.31 </a:t>
+            </a:r>
+            <a:r>
+              <a:rPr sz="2400" dirty="0" err="1"/>
+              <a:t>ms</a:t>
+            </a:r>
+            <a:r>
+              <a:rPr sz="2400" dirty="0"/>
+              <a:t> server | Parallel Hybrid (PQC H-365): 10.27 </a:t>
+            </a:r>
+            <a:r>
+              <a:rPr sz="2400" dirty="0" err="1"/>
+              <a:t>ms</a:t>
+            </a:r>
+            <a:r>
+              <a:rPr sz="2400" dirty="0"/>
+              <a:t> client / 11.79 </a:t>
+            </a:r>
+            <a:r>
+              <a:rPr sz="2400" dirty="0" err="1"/>
+              <a:t>ms</a:t>
+            </a:r>
+            <a:r>
+              <a:rPr sz="2400" dirty="0"/>
+              <a:t> server.</a:t>
+            </a:r>
+          </a:p>
+          <a:p>
+            <a:pPr>
               <a:lnSpc>
-                <a:spcPts val="2939"/>
+                <a:spcPct val="150000"/>
               </a:lnSpc>
               <a:spcAft>
                 <a:spcPts val="1200"/>
@@ -12341,13 +12524,26 @@
               </a:defRPr>
             </a:pPr>
             <a:r>
-              <a:t>   Classical X25519 only:        1.56 ms avg</a:t>
-            </a:r>
-          </a:p>
-          <a:p>
-            <a:pPr algn="ctr">
+              <a:rPr sz="2400" b="1" dirty="0"/>
+              <a:t>• 81.5% Latency Reduction on Client &amp; 79.1% Reduction on Server: </a:t>
+            </a:r>
+            <a:r>
+              <a:rPr sz="2400" dirty="0"/>
+              <a:t>Confirms that post-quantum security is achievable with ~11 </a:t>
+            </a:r>
+            <a:r>
+              <a:rPr sz="2400" dirty="0" err="1"/>
+              <a:t>ms</a:t>
+            </a:r>
+            <a:r>
+              <a:rPr sz="2400" dirty="0"/>
+              <a:t> total latency, matching production network demands.</a:t>
+            </a:r>
+          </a:p>
+          <a:p>
+            <a:pPr>
               <a:lnSpc>
-                <a:spcPts val="2939"/>
+                <a:spcPct val="150000"/>
               </a:lnSpc>
               <a:spcAft>
                 <a:spcPts val="1200"/>
@@ -12360,13 +12556,26 @@
               </a:defRPr>
             </a:pPr>
             <a:r>
-              <a:t>   ML-KEM-768 only:              8.43 ms encap / 8.11 ms decap</a:t>
-            </a:r>
-          </a:p>
-          <a:p>
-            <a:pPr algn="ctr">
+              <a:rPr sz="2400" b="1" dirty="0"/>
+              <a:t>•</a:t>
+            </a:r>
+            <a:r>
+              <a:rPr lang="en-US" sz="2400" b="1" dirty="0"/>
+              <a:t>Live Channel Verification: </a:t>
+            </a:r>
+            <a:r>
+              <a:rPr sz="2400" b="1" dirty="0"/>
+              <a:t> </a:t>
+            </a:r>
+            <a:r>
+              <a:rPr sz="2400" dirty="0"/>
+              <a:t>Verified identical SHA-256 session key derivation (59b7b6397a0ea3bd), monotonic counter validation (ctr=1, ctr=2), and authenticated clean shutdown.</a:t>
+            </a:r>
+          </a:p>
+          <a:p>
+            <a:pPr>
               <a:lnSpc>
-                <a:spcPts val="2939"/>
+                <a:spcPct val="150000"/>
               </a:lnSpc>
               <a:spcAft>
                 <a:spcPts val="1200"/>
@@ -12379,235 +12588,12 @@
               </a:defRPr>
             </a:pPr>
             <a:r>
-              <a:t>   Sequential Hybrid:           55.56 ms client / 56.31 ms server</a:t>
-            </a:r>
-          </a:p>
-          <a:p>
-            <a:pPr algn="ctr">
-              <a:lnSpc>
-                <a:spcPts val="2939"/>
-              </a:lnSpc>
-              <a:spcAft>
-                <a:spcPts val="1200"/>
-              </a:spcAft>
-              <a:defRPr sz="1800">
-                <a:solidFill>
-                  <a:srgbClr val="1E293B"/>
-                </a:solidFill>
-                <a:latin typeface="IBM Plex Sans"/>
-              </a:defRPr>
-            </a:pPr>
-            <a:r>
-              <a:t>   Parallel Hybrid (pthreads):  ~55 ms  (21% improvement vs theoretical)</a:t>
-            </a:r>
-          </a:p>
-          <a:p>
-            <a:pPr algn="ctr">
-              <a:lnSpc>
-                <a:spcPts val="2939"/>
-              </a:lnSpc>
-              <a:spcAft>
-                <a:spcPts val="1200"/>
-              </a:spcAft>
-              <a:defRPr sz="1800">
-                <a:solidFill>
-                  <a:srgbClr val="1E293B"/>
-                </a:solidFill>
-                <a:latin typeface="IBM Plex Sans"/>
-              </a:defRPr>
-            </a:pPr>
-            <a:r>
-              <a:t/>
-            </a:r>
-          </a:p>
-          <a:p>
-            <a:pPr algn="ctr">
-              <a:lnSpc>
-                <a:spcPts val="2939"/>
-              </a:lnSpc>
-              <a:spcAft>
-                <a:spcPts val="1200"/>
-              </a:spcAft>
-              <a:defRPr sz="1800">
-                <a:solidFill>
-                  <a:srgbClr val="1E293B"/>
-                </a:solidFill>
-                <a:latin typeface="IBM Plex Sans"/>
-              </a:defRPr>
-            </a:pPr>
-            <a:r>
-              <a:t>▸ Security Guarantees Verified</a:t>
-            </a:r>
-          </a:p>
-          <a:p>
-            <a:pPr algn="ctr">
-              <a:lnSpc>
-                <a:spcPts val="2939"/>
-              </a:lnSpc>
-              <a:spcAft>
-                <a:spcPts val="1200"/>
-              </a:spcAft>
-              <a:defRPr sz="1800">
-                <a:solidFill>
-                  <a:srgbClr val="1E293B"/>
-                </a:solidFill>
-                <a:latin typeface="IBM Plex Sans"/>
-              </a:defRPr>
-            </a:pPr>
-            <a:r>
-              <a:t>   Hybrid session key derivation: SHA-256(X25519_secret ‖ ML-KEM_secret) ✓</a:t>
-            </a:r>
-          </a:p>
-          <a:p>
-            <a:pPr algn="ctr">
-              <a:lnSpc>
-                <a:spcPts val="2939"/>
-              </a:lnSpc>
-              <a:spcAft>
-                <a:spcPts val="1200"/>
-              </a:spcAft>
-              <a:defRPr sz="1800">
-                <a:solidFill>
-                  <a:srgbClr val="1E293B"/>
-                </a:solidFill>
-                <a:latin typeface="IBM Plex Sans"/>
-              </a:defRPr>
-            </a:pPr>
-            <a:r>
-              <a:t>   ChaCha20-Poly1305 authentication tags verified on all messages ✓</a:t>
-            </a:r>
-          </a:p>
-          <a:p>
-            <a:pPr algn="ctr">
-              <a:lnSpc>
-                <a:spcPts val="2939"/>
-              </a:lnSpc>
-              <a:spcAft>
-                <a:spcPts val="1200"/>
-              </a:spcAft>
-              <a:defRPr sz="1800">
-                <a:solidFill>
-                  <a:srgbClr val="1E293B"/>
-                </a:solidFill>
-                <a:latin typeface="IBM Plex Sans"/>
-              </a:defRPr>
-            </a:pPr>
-            <a:r>
-              <a:t>   Monotonic counter replay-protection blocking duplicate counters ✓</a:t>
-            </a:r>
-          </a:p>
-          <a:p>
-            <a:pPr algn="ctr">
-              <a:lnSpc>
-                <a:spcPts val="2939"/>
-              </a:lnSpc>
-              <a:spcAft>
-                <a:spcPts val="1200"/>
-              </a:spcAft>
-              <a:defRPr sz="1800">
-                <a:solidFill>
-                  <a:srgbClr val="1E293B"/>
-                </a:solidFill>
-                <a:latin typeface="IBM Plex Sans"/>
-              </a:defRPr>
-            </a:pPr>
-            <a:r>
-              <a:t>   5-message multi-round exchange over encrypted channel ✓</a:t>
-            </a:r>
-          </a:p>
-          <a:p>
-            <a:pPr algn="ctr">
-              <a:lnSpc>
-                <a:spcPts val="2939"/>
-              </a:lnSpc>
-              <a:spcAft>
-                <a:spcPts val="1200"/>
-              </a:spcAft>
-              <a:defRPr sz="1800">
-                <a:solidFill>
-                  <a:srgbClr val="1E293B"/>
-                </a:solidFill>
-                <a:latin typeface="IBM Plex Sans"/>
-              </a:defRPr>
-            </a:pPr>
-            <a:r>
-              <a:t/>
-            </a:r>
-          </a:p>
-          <a:p>
-            <a:pPr algn="ctr">
-              <a:lnSpc>
-                <a:spcPts val="2939"/>
-              </a:lnSpc>
-              <a:spcAft>
-                <a:spcPts val="1200"/>
-              </a:spcAft>
-              <a:defRPr sz="1800">
-                <a:solidFill>
-                  <a:srgbClr val="1E293B"/>
-                </a:solidFill>
-                <a:latin typeface="IBM Plex Sans"/>
-              </a:defRPr>
-            </a:pPr>
-            <a:r>
-              <a:t>▸ Quantum Security Level</a:t>
-            </a:r>
-          </a:p>
-          <a:p>
-            <a:pPr algn="ctr">
-              <a:lnSpc>
-                <a:spcPts val="2939"/>
-              </a:lnSpc>
-              <a:spcAft>
-                <a:spcPts val="1200"/>
-              </a:spcAft>
-              <a:defRPr sz="1800">
-                <a:solidFill>
-                  <a:srgbClr val="1E293B"/>
-                </a:solidFill>
-                <a:latin typeface="IBM Plex Sans"/>
-              </a:defRPr>
-            </a:pPr>
-            <a:r>
-              <a:t>   ML-KEM-768: NIST Security Level 3 (≥161-bit quantum security)</a:t>
-            </a:r>
-          </a:p>
-          <a:p>
-            <a:pPr algn="ctr">
-              <a:lnSpc>
-                <a:spcPts val="2939"/>
-              </a:lnSpc>
-              <a:spcAft>
-                <a:spcPts val="1200"/>
-              </a:spcAft>
-              <a:defRPr sz="1800">
-                <a:solidFill>
-                  <a:srgbClr val="1E293B"/>
-                </a:solidFill>
-                <a:latin typeface="IBM Plex Sans"/>
-              </a:defRPr>
-            </a:pPr>
-            <a:r>
-              <a:t>   Equivalent to AES-192 against quantum adversaries</a:t>
-            </a:r>
-          </a:p>
-          <a:p>
-            <a:pPr algn="ctr">
-              <a:lnSpc>
-                <a:spcPts val="2939"/>
-              </a:lnSpc>
-              <a:spcAft>
-                <a:spcPts val="1200"/>
-              </a:spcAft>
-              <a:defRPr sz="1800">
-                <a:solidFill>
-                  <a:srgbClr val="1E293B"/>
-                </a:solidFill>
-                <a:latin typeface="IBM Plex Sans"/>
-              </a:defRPr>
-            </a:pPr>
-            <a:r>
-              <a:t>   Compliant with NIST FIPS 203 (August 2024) and NSA CNSA 2.0</a:t>
+              <a:rPr sz="2400" b="1" dirty="0"/>
+              <a:t>• Framing Boundary Verification: </a:t>
+            </a:r>
+            <a:r>
+              <a:rPr sz="2400" dirty="0"/>
+              <a:t>Validated 1184B, 3309B, 4096B frame delivery; correctly rejected 4097B oversized packets without memory leaks.</a:t>
             </a:r>
           </a:p>
         </p:txBody>
@@ -13292,8 +13278,8 @@
         </p:nvSpPr>
         <p:spPr>
           <a:xfrm>
-            <a:off x="7564606" y="1839634"/>
-            <a:ext cx="1870034" cy="405111"/>
+            <a:off x="7792679" y="2453231"/>
+            <a:ext cx="2951521" cy="457241"/>
           </a:xfrm>
           <a:prstGeom prst="rect">
             <a:avLst/>
@@ -13305,7 +13291,24 @@
           </a:bodyPr>
           <a:lstStyle/>
           <a:p>
-            <a:r>
+            <a:pPr algn="ctr">
+              <a:lnSpc>
+                <a:spcPts val="3359"/>
+              </a:lnSpc>
+              <a:spcBef>
+                <a:spcPct val="0"/>
+              </a:spcBef>
+            </a:pPr>
+            <a:r>
+              <a:rPr lang="en-US" sz="4000" b="1" dirty="0">
+                <a:solidFill>
+                  <a:srgbClr val="000000"/>
+                </a:solidFill>
+                <a:latin typeface="IBM Plex Sans"/>
+                <a:ea typeface="IBM Plex Sans"/>
+                <a:cs typeface="IBM Plex Sans"/>
+                <a:sym typeface="IBM Plex Sans"/>
+              </a:rPr>
               <a:t>ROADMAP</a:t>
             </a:r>
           </a:p>
@@ -13319,8 +13322,8 @@
         </p:nvSpPr>
         <p:spPr>
           <a:xfrm>
-            <a:off x="2024556" y="3801229"/>
-            <a:ext cx="14326443" cy="4873129"/>
+            <a:off x="2378859" y="3155200"/>
+            <a:ext cx="14326443" cy="6427722"/>
           </a:xfrm>
           <a:prstGeom prst="rect">
             <a:avLst/>
@@ -13334,7 +13337,7 @@
           <a:p>
             <a:pPr algn="ctr">
               <a:lnSpc>
-                <a:spcPts val="3219"/>
+                <a:spcPct val="150000"/>
               </a:lnSpc>
               <a:spcBef>
                 <a:spcPct val="0"/>
@@ -13350,17 +13353,25 @@
               </a:defRPr>
             </a:pPr>
             <a:r>
-              <a:t>▸ Round 2 Enhancement Sprint (Oct 10 – 29)</a:t>
-            </a:r>
-          </a:p>
-          <a:p>
-            <a:pPr algn="ctr">
+              <a:rPr sz="2400" b="1" dirty="0">
+                <a:latin typeface="Times New Roman" panose="02020603050405020304" pitchFamily="18" charset="0"/>
+                <a:cs typeface="Times New Roman" panose="02020603050405020304" pitchFamily="18" charset="0"/>
+              </a:rPr>
+              <a:t>• </a:t>
+            </a:r>
+            <a:r>
+              <a:rPr sz="3200" b="1" dirty="0">
+                <a:latin typeface="Times New Roman" panose="02020603050405020304" pitchFamily="18" charset="0"/>
+                <a:cs typeface="Times New Roman" panose="02020603050405020304" pitchFamily="18" charset="0"/>
+              </a:rPr>
+              <a:t>Round 2 Enhancement Sprint (Oct 10 – 29):</a:t>
+            </a:r>
+          </a:p>
+          <a:p>
+            <a:pPr>
               <a:lnSpc>
-                <a:spcPts val="3219"/>
+                <a:spcPct val="150000"/>
               </a:lnSpc>
-              <a:spcBef>
-                <a:spcPct val="0"/>
-              </a:spcBef>
               <a:spcAft>
                 <a:spcPts val="1200"/>
               </a:spcAft>
@@ -13372,17 +13383,25 @@
               </a:defRPr>
             </a:pPr>
             <a:r>
-              <a:t>   Step 29: Linux TUN/TAP Integration — bind /dev/net/tun virtual interface (tun0) to route real OS-level IP traffic through the quantum-resistant tunnel.</a:t>
-            </a:r>
-          </a:p>
-          <a:p>
-            <a:pPr algn="ctr">
+              <a:rPr sz="2400" b="1" dirty="0">
+                <a:latin typeface="Times New Roman" panose="02020603050405020304" pitchFamily="18" charset="0"/>
+                <a:cs typeface="Times New Roman" panose="02020603050405020304" pitchFamily="18" charset="0"/>
+              </a:rPr>
+              <a:t>• Step 29 Linux TUN/TAP Integration: </a:t>
+            </a:r>
+            <a:r>
+              <a:rPr sz="2400" dirty="0">
+                <a:latin typeface="Times New Roman" panose="02020603050405020304" pitchFamily="18" charset="0"/>
+                <a:cs typeface="Times New Roman" panose="02020603050405020304" pitchFamily="18" charset="0"/>
+              </a:rPr>
+              <a:t>Binding /dev/net/tun virtual interface (tun0) to route real OS-level IPv4/IPv6 packet flows.</a:t>
+            </a:r>
+          </a:p>
+          <a:p>
+            <a:pPr>
               <a:lnSpc>
-                <a:spcPts val="3219"/>
+                <a:spcPct val="150000"/>
               </a:lnSpc>
-              <a:spcBef>
-                <a:spcPct val="0"/>
-              </a:spcBef>
               <a:spcAft>
                 <a:spcPts val="1200"/>
               </a:spcAft>
@@ -13394,17 +13413,39 @@
               </a:defRPr>
             </a:pPr>
             <a:r>
-              <a:t>   Step 30: Full VPN Daemon — persistent systemd service with config file, multi-client support, and graceful reconnect logic.</a:t>
-            </a:r>
-          </a:p>
-          <a:p>
-            <a:pPr algn="ctr">
+              <a:rPr sz="2400" b="1" dirty="0">
+                <a:latin typeface="Times New Roman" panose="02020603050405020304" pitchFamily="18" charset="0"/>
+                <a:cs typeface="Times New Roman" panose="02020603050405020304" pitchFamily="18" charset="0"/>
+              </a:rPr>
+              <a:t>• </a:t>
+            </a:r>
+            <a:r>
+              <a:rPr sz="2400" b="1" dirty="0" err="1">
+                <a:latin typeface="Times New Roman" panose="02020603050405020304" pitchFamily="18" charset="0"/>
+                <a:cs typeface="Times New Roman" panose="02020603050405020304" pitchFamily="18" charset="0"/>
+              </a:rPr>
+              <a:t>eBPF</a:t>
+            </a:r>
+            <a:r>
+              <a:rPr sz="2400" b="1" dirty="0">
+                <a:latin typeface="Times New Roman" panose="02020603050405020304" pitchFamily="18" charset="0"/>
+                <a:cs typeface="Times New Roman" panose="02020603050405020304" pitchFamily="18" charset="0"/>
+              </a:rPr>
+              <a:t> / XDP In-Kernel Acceleration: </a:t>
+            </a:r>
+            <a:r>
+              <a:rPr sz="2400" dirty="0">
+                <a:latin typeface="Times New Roman" panose="02020603050405020304" pitchFamily="18" charset="0"/>
+                <a:cs typeface="Times New Roman" panose="02020603050405020304" pitchFamily="18" charset="0"/>
+              </a:rPr>
+              <a:t>Implementing line-rate packet filter hooks in kernel space for ultra-fast AEAD decryption.</a:t>
+            </a:r>
+          </a:p>
+          <a:p>
+            <a:pPr>
               <a:lnSpc>
-                <a:spcPts val="3219"/>
+                <a:spcPct val="150000"/>
               </a:lnSpc>
-              <a:spcBef>
-                <a:spcPct val="0"/>
-              </a:spcBef>
               <a:spcAft>
                 <a:spcPts val="1200"/>
               </a:spcAft>
@@ -13416,17 +13457,25 @@
               </a:defRPr>
             </a:pPr>
             <a:r>
-              <a:t>   Step 31: SLH-DSA (FIPS 205) Mutual Authentication — replace X.509 certificates with post-quantum digital signatures.</a:t>
-            </a:r>
-          </a:p>
-          <a:p>
-            <a:pPr algn="ctr">
+              <a:rPr sz="2400" b="1" dirty="0">
+                <a:latin typeface="Times New Roman" panose="02020603050405020304" pitchFamily="18" charset="0"/>
+                <a:cs typeface="Times New Roman" panose="02020603050405020304" pitchFamily="18" charset="0"/>
+              </a:rPr>
+              <a:t>• Multi-Path Link Aggregation: </a:t>
+            </a:r>
+            <a:r>
+              <a:rPr sz="2400" dirty="0">
+                <a:latin typeface="Times New Roman" panose="02020603050405020304" pitchFamily="18" charset="0"/>
+                <a:cs typeface="Times New Roman" panose="02020603050405020304" pitchFamily="18" charset="0"/>
+              </a:rPr>
+              <a:t>Multiplexing encrypted AEAD frames across dual physical network interfaces for link failover and bonding.</a:t>
+            </a:r>
+          </a:p>
+          <a:p>
+            <a:pPr>
               <a:lnSpc>
-                <a:spcPts val="3219"/>
+                <a:spcPct val="150000"/>
               </a:lnSpc>
-              <a:spcBef>
-                <a:spcPct val="0"/>
-              </a:spcBef>
               <a:spcAft>
                 <a:spcPts val="1200"/>
               </a:spcAft>
@@ -13438,17 +13487,25 @@
               </a:defRPr>
             </a:pPr>
             <a:r>
-              <a:t/>
-            </a:r>
-          </a:p>
-          <a:p>
-            <a:pPr algn="ctr">
+              <a:rPr sz="2400" b="1" dirty="0">
+                <a:latin typeface="Times New Roman" panose="02020603050405020304" pitchFamily="18" charset="0"/>
+                <a:cs typeface="Times New Roman" panose="02020603050405020304" pitchFamily="18" charset="0"/>
+              </a:rPr>
+              <a:t>• Adversarial Network Fuzzing: </a:t>
+            </a:r>
+            <a:r>
+              <a:rPr sz="2400" dirty="0">
+                <a:latin typeface="Times New Roman" panose="02020603050405020304" pitchFamily="18" charset="0"/>
+                <a:cs typeface="Times New Roman" panose="02020603050405020304" pitchFamily="18" charset="0"/>
+              </a:rPr>
+              <a:t>Scapy / Kali fuzzing testbed testing resistance to malformed quantum packets.</a:t>
+            </a:r>
+          </a:p>
+          <a:p>
+            <a:pPr>
               <a:lnSpc>
-                <a:spcPts val="3219"/>
+                <a:spcPct val="150000"/>
               </a:lnSpc>
-              <a:spcBef>
-                <a:spcPct val="0"/>
-              </a:spcBef>
               <a:spcAft>
                 <a:spcPts val="1200"/>
               </a:spcAft>
@@ -13460,161 +13517,18 @@
               </a:defRPr>
             </a:pPr>
             <a:r>
-              <a:t>▸ Round 3 / Production Path (Post-Hackathon)</a:t>
-            </a:r>
-          </a:p>
-          <a:p>
-            <a:pPr algn="ctr">
-              <a:lnSpc>
-                <a:spcPts val="3219"/>
-              </a:lnSpc>
-              <a:spcBef>
-                <a:spcPct val="0"/>
-              </a:spcBef>
-              <a:spcAft>
-                <a:spcPts val="1200"/>
-              </a:spcAft>
-              <a:defRPr sz="1700">
-                <a:solidFill>
-                  <a:srgbClr val="1E293B"/>
-                </a:solidFill>
-                <a:latin typeface="IBM Plex Sans"/>
-              </a:defRPr>
-            </a:pPr>
-            <a:r>
-              <a:t>   Performance: Hardware AES-NI and AVX2 optimisation for ML-KEM matrix ops.</a:t>
-            </a:r>
-          </a:p>
-          <a:p>
-            <a:pPr algn="ctr">
-              <a:lnSpc>
-                <a:spcPts val="3219"/>
-              </a:lnSpc>
-              <a:spcBef>
-                <a:spcPct val="0"/>
-              </a:spcBef>
-              <a:spcAft>
-                <a:spcPts val="1200"/>
-              </a:spcAft>
-              <a:defRPr sz="1700">
-                <a:solidFill>
-                  <a:srgbClr val="1E293B"/>
-                </a:solidFill>
-                <a:latin typeface="IBM Plex Sans"/>
-              </a:defRPr>
-            </a:pPr>
-            <a:r>
-              <a:t>   Compliance: FIPS 140-3 validation boundary definition.</a:t>
-            </a:r>
-          </a:p>
-          <a:p>
-            <a:pPr algn="ctr">
-              <a:lnSpc>
-                <a:spcPts val="3219"/>
-              </a:lnSpc>
-              <a:spcBef>
-                <a:spcPct val="0"/>
-              </a:spcBef>
-              <a:spcAft>
-                <a:spcPts val="1200"/>
-              </a:spcAft>
-              <a:defRPr sz="1700">
-                <a:solidFill>
-                  <a:srgbClr val="1E293B"/>
-                </a:solidFill>
-                <a:latin typeface="IBM Plex Sans"/>
-              </a:defRPr>
-            </a:pPr>
-            <a:r>
-              <a:t>   Ecosystem: OpenWRT package for quantum-safe home/enterprise routers.</a:t>
-            </a:r>
-          </a:p>
-          <a:p>
-            <a:pPr algn="ctr">
-              <a:lnSpc>
-                <a:spcPts val="3219"/>
-              </a:lnSpc>
-              <a:spcBef>
-                <a:spcPct val="0"/>
-              </a:spcBef>
-              <a:spcAft>
-                <a:spcPts val="1200"/>
-              </a:spcAft>
-              <a:defRPr sz="1700">
-                <a:solidFill>
-                  <a:srgbClr val="1E293B"/>
-                </a:solidFill>
-                <a:latin typeface="IBM Plex Sans"/>
-              </a:defRPr>
-            </a:pPr>
-            <a:r>
-              <a:t>   Enterprise: Integration adapter for WireGuard and OpenVPN protocol stacks.</a:t>
-            </a:r>
-          </a:p>
-          <a:p>
-            <a:pPr algn="ctr">
-              <a:lnSpc>
-                <a:spcPts val="3219"/>
-              </a:lnSpc>
-              <a:spcBef>
-                <a:spcPct val="0"/>
-              </a:spcBef>
-              <a:spcAft>
-                <a:spcPts val="1200"/>
-              </a:spcAft>
-              <a:defRPr sz="1700">
-                <a:solidFill>
-                  <a:srgbClr val="1E293B"/>
-                </a:solidFill>
-                <a:latin typeface="IBM Plex Sans"/>
-              </a:defRPr>
-            </a:pPr>
-            <a:r>
-              <a:t/>
-            </a:r>
-          </a:p>
-          <a:p>
-            <a:pPr algn="ctr">
-              <a:lnSpc>
-                <a:spcPts val="3219"/>
-              </a:lnSpc>
-              <a:spcBef>
-                <a:spcPct val="0"/>
-              </a:spcBef>
-              <a:spcAft>
-                <a:spcPts val="1200"/>
-              </a:spcAft>
-              <a:defRPr sz="1700">
-                <a:solidFill>
-                  <a:srgbClr val="1E293B"/>
-                </a:solidFill>
-                <a:latin typeface="IBM Plex Sans"/>
-              </a:defRPr>
-            </a:pPr>
-            <a:r>
-              <a:t>▸ Long-Term Vision</a:t>
-            </a:r>
-          </a:p>
-          <a:p>
-            <a:pPr algn="ctr">
-              <a:lnSpc>
-                <a:spcPts val="3219"/>
-              </a:lnSpc>
-              <a:spcBef>
-                <a:spcPct val="0"/>
-              </a:spcBef>
-              <a:spcAft>
-                <a:spcPts val="1200"/>
-              </a:spcAft>
-              <a:defRPr sz="1700">
-                <a:solidFill>
-                  <a:srgbClr val="1E293B"/>
-                </a:solidFill>
-                <a:latin typeface="IBM Plex Sans"/>
-              </a:defRPr>
-            </a:pPr>
-            <a:r>
-              <a:t>   PQC H-365 as the open-source reference implementation for quantum-resistant VPN infrastructure adopted by governments and enterprises transitioning to NIST PQC standards by the 2030 CNSA 2.0 mandate deadline.</a:t>
+              <a:rPr sz="2400" b="1" dirty="0">
+                <a:latin typeface="Times New Roman" panose="02020603050405020304" pitchFamily="18" charset="0"/>
+                <a:cs typeface="Times New Roman" panose="02020603050405020304" pitchFamily="18" charset="0"/>
+              </a:rPr>
+              <a:t>• Grand Finale (Bengaluru: Oct 30 – 31): </a:t>
+            </a:r>
+            <a:r>
+              <a:rPr sz="2400" dirty="0">
+                <a:latin typeface="Times New Roman" panose="02020603050405020304" pitchFamily="18" charset="0"/>
+                <a:cs typeface="Times New Roman" panose="02020603050405020304" pitchFamily="18" charset="0"/>
+              </a:rPr>
+              <a:t>Live hardware demonstration of the physical tunnel with Wireshark packet capture analysis, active quantum stripping rejection, and telemetry dashboards.</a:t>
             </a:r>
           </a:p>
         </p:txBody>
@@ -13954,4 +13868,319 @@
   <a:objectDefaults/>
   <a:extraClrSchemeLst/>
 </a:theme>
+</file>
+
+<file path=ppt/theme/theme2.xml><?xml version="1.0" encoding="utf-8"?>
+<a:theme xmlns:a="http://schemas.openxmlformats.org/drawingml/2006/main" name="Office Theme">
+  <a:themeElements>
+    <a:clrScheme name="Office">
+      <a:dk1>
+        <a:sysClr val="windowText" lastClr="000000"/>
+      </a:dk1>
+      <a:lt1>
+        <a:sysClr val="window" lastClr="FFFFFF"/>
+      </a:lt1>
+      <a:dk2>
+        <a:srgbClr val="0E2841"/>
+      </a:dk2>
+      <a:lt2>
+        <a:srgbClr val="E8E8E8"/>
+      </a:lt2>
+      <a:accent1>
+        <a:srgbClr val="156082"/>
+      </a:accent1>
+      <a:accent2>
+        <a:srgbClr val="E97132"/>
+      </a:accent2>
+      <a:accent3>
+        <a:srgbClr val="196B24"/>
+      </a:accent3>
+      <a:accent4>
+        <a:srgbClr val="0F9ED5"/>
+      </a:accent4>
+      <a:accent5>
+        <a:srgbClr val="A02B93"/>
+      </a:accent5>
+      <a:accent6>
+        <a:srgbClr val="4EA72E"/>
+      </a:accent6>
+      <a:hlink>
+        <a:srgbClr val="467886"/>
+      </a:hlink>
+      <a:folHlink>
+        <a:srgbClr val="96607D"/>
+      </a:folHlink>
+    </a:clrScheme>
+    <a:fontScheme name="Office">
+      <a:majorFont>
+        <a:latin typeface="Aptos Display" panose="02110004020202020204"/>
+        <a:ea typeface=""/>
+        <a:cs typeface=""/>
+        <a:font script="Jpan" typeface="游ゴシック Light"/>
+        <a:font script="Hang" typeface="맑은 고딕"/>
+        <a:font script="Hans" typeface="等线 Light"/>
+        <a:font script="Hant" typeface="新細明體"/>
+        <a:font script="Arab" typeface="Times New Roman"/>
+        <a:font script="Hebr" typeface="Times New Roman"/>
+        <a:font script="Thai" typeface="Angsana New"/>
+        <a:font script="Ethi" typeface="Nyala"/>
+        <a:font script="Beng" typeface="Vrinda"/>
+        <a:font script="Gujr" typeface="Shruti"/>
+        <a:font script="Khmr" typeface="MoolBoran"/>
+        <a:font script="Knda" typeface="Tunga"/>
+        <a:font script="Guru" typeface="Raavi"/>
+        <a:font script="Cans" typeface="Euphemia"/>
+        <a:font script="Cher" typeface="Plantagenet Cherokee"/>
+        <a:font script="Yiii" typeface="Microsoft Yi Baiti"/>
+        <a:font script="Tibt" typeface="Microsoft Himalaya"/>
+        <a:font script="Thaa" typeface="MV Boli"/>
+        <a:font script="Deva" typeface="Mangal"/>
+        <a:font script="Telu" typeface="Gautami"/>
+        <a:font script="Taml" typeface="Latha"/>
+        <a:font script="Syrc" typeface="Estrangelo Edessa"/>
+        <a:font script="Orya" typeface="Kalinga"/>
+        <a:font script="Mlym" typeface="Kartika"/>
+        <a:font script="Laoo" typeface="DokChampa"/>
+        <a:font script="Sinh" typeface="Iskoola Pota"/>
+        <a:font script="Mong" typeface="Mongolian Baiti"/>
+        <a:font script="Viet" typeface="Times New Roman"/>
+        <a:font script="Uigh" typeface="Microsoft Uighur"/>
+        <a:font script="Geor" typeface="Sylfaen"/>
+        <a:font script="Armn" typeface="Arial"/>
+        <a:font script="Bugi" typeface="Leelawadee UI"/>
+        <a:font script="Bopo" typeface="Microsoft JhengHei"/>
+        <a:font script="Java" typeface="Javanese Text"/>
+        <a:font script="Lisu" typeface="Segoe UI"/>
+        <a:font script="Mymr" typeface="Myanmar Text"/>
+        <a:font script="Nkoo" typeface="Ebrima"/>
+        <a:font script="Olck" typeface="Nirmala UI"/>
+        <a:font script="Osma" typeface="Ebrima"/>
+        <a:font script="Phag" typeface="Phagspa"/>
+        <a:font script="Syrn" typeface="Estrangelo Edessa"/>
+        <a:font script="Syrj" typeface="Estrangelo Edessa"/>
+        <a:font script="Syre" typeface="Estrangelo Edessa"/>
+        <a:font script="Sora" typeface="Nirmala UI"/>
+        <a:font script="Tale" typeface="Microsoft Tai Le"/>
+        <a:font script="Talu" typeface="Microsoft New Tai Lue"/>
+        <a:font script="Tfng" typeface="Ebrima"/>
+      </a:majorFont>
+      <a:minorFont>
+        <a:latin typeface="Aptos" panose="02110004020202020204"/>
+        <a:ea typeface=""/>
+        <a:cs typeface=""/>
+        <a:font script="Jpan" typeface="游ゴシック"/>
+        <a:font script="Hang" typeface="맑은 고딕"/>
+        <a:font script="Hans" typeface="等线"/>
+        <a:font script="Hant" typeface="新細明體"/>
+        <a:font script="Arab" typeface="Arial"/>
+        <a:font script="Hebr" typeface="Arial"/>
+        <a:font script="Thai" typeface="Cordia New"/>
+        <a:font script="Ethi" typeface="Nyala"/>
+        <a:font script="Beng" typeface="Vrinda"/>
+        <a:font script="Gujr" typeface="Shruti"/>
+        <a:font script="Khmr" typeface="DaunPenh"/>
+        <a:font script="Knda" typeface="Tunga"/>
+        <a:font script="Guru" typeface="Raavi"/>
+        <a:font script="Cans" typeface="Euphemia"/>
+        <a:font script="Cher" typeface="Plantagenet Cherokee"/>
+        <a:font script="Yiii" typeface="Microsoft Yi Baiti"/>
+        <a:font script="Tibt" typeface="Microsoft Himalaya"/>
+        <a:font script="Thaa" typeface="MV Boli"/>
+        <a:font script="Deva" typeface="Mangal"/>
+        <a:font script="Telu" typeface="Gautami"/>
+        <a:font script="Taml" typeface="Latha"/>
+        <a:font script="Syrc" typeface="Estrangelo Edessa"/>
+        <a:font script="Orya" typeface="Kalinga"/>
+        <a:font script="Mlym" typeface="Kartika"/>
+        <a:font script="Laoo" typeface="DokChampa"/>
+        <a:font script="Sinh" typeface="Iskoola Pota"/>
+        <a:font script="Mong" typeface="Mongolian Baiti"/>
+        <a:font script="Viet" typeface="Arial"/>
+        <a:font script="Uigh" typeface="Microsoft Uighur"/>
+        <a:font script="Geor" typeface="Sylfaen"/>
+        <a:font script="Armn" typeface="Arial"/>
+        <a:font script="Bugi" typeface="Leelawadee UI"/>
+        <a:font script="Bopo" typeface="Microsoft JhengHei"/>
+        <a:font script="Java" typeface="Javanese Text"/>
+        <a:font script="Lisu" typeface="Segoe UI"/>
+        <a:font script="Mymr" typeface="Myanmar Text"/>
+        <a:font script="Nkoo" typeface="Ebrima"/>
+        <a:font script="Olck" typeface="Nirmala UI"/>
+        <a:font script="Osma" typeface="Ebrima"/>
+        <a:font script="Phag" typeface="Phagspa"/>
+        <a:font script="Syrn" typeface="Estrangelo Edessa"/>
+        <a:font script="Syrj" typeface="Estrangelo Edessa"/>
+        <a:font script="Syre" typeface="Estrangelo Edessa"/>
+        <a:font script="Sora" typeface="Nirmala UI"/>
+        <a:font script="Tale" typeface="Microsoft Tai Le"/>
+        <a:font script="Talu" typeface="Microsoft New Tai Lue"/>
+        <a:font script="Tfng" typeface="Ebrima"/>
+      </a:minorFont>
+    </a:fontScheme>
+    <a:fmtScheme name="Office">
+      <a:fillStyleLst>
+        <a:solidFill>
+          <a:schemeClr val="phClr"/>
+        </a:solidFill>
+        <a:gradFill rotWithShape="1">
+          <a:gsLst>
+            <a:gs pos="0">
+              <a:schemeClr val="phClr">
+                <a:lumMod val="110000"/>
+                <a:satMod val="105000"/>
+                <a:tint val="67000"/>
+              </a:schemeClr>
+            </a:gs>
+            <a:gs pos="50000">
+              <a:schemeClr val="phClr">
+                <a:lumMod val="105000"/>
+                <a:satMod val="103000"/>
+                <a:tint val="73000"/>
+              </a:schemeClr>
+            </a:gs>
+            <a:gs pos="100000">
+              <a:schemeClr val="phClr">
+                <a:lumMod val="105000"/>
+                <a:satMod val="109000"/>
+                <a:tint val="81000"/>
+              </a:schemeClr>
+            </a:gs>
+          </a:gsLst>
+          <a:lin ang="5400000" scaled="0"/>
+        </a:gradFill>
+        <a:gradFill rotWithShape="1">
+          <a:gsLst>
+            <a:gs pos="0">
+              <a:schemeClr val="phClr">
+                <a:satMod val="103000"/>
+                <a:lumMod val="102000"/>
+                <a:tint val="94000"/>
+              </a:schemeClr>
+            </a:gs>
+            <a:gs pos="50000">
+              <a:schemeClr val="phClr">
+                <a:satMod val="110000"/>
+                <a:lumMod val="100000"/>
+                <a:shade val="100000"/>
+              </a:schemeClr>
+            </a:gs>
+            <a:gs pos="100000">
+              <a:schemeClr val="phClr">
+                <a:lumMod val="99000"/>
+                <a:satMod val="120000"/>
+                <a:shade val="78000"/>
+              </a:schemeClr>
+            </a:gs>
+          </a:gsLst>
+          <a:lin ang="5400000" scaled="0"/>
+        </a:gradFill>
+      </a:fillStyleLst>
+      <a:lnStyleLst>
+        <a:ln w="12700" cap="flat" cmpd="sng" algn="ctr">
+          <a:solidFill>
+            <a:schemeClr val="phClr"/>
+          </a:solidFill>
+          <a:prstDash val="solid"/>
+          <a:miter lim="800000"/>
+        </a:ln>
+        <a:ln w="19050" cap="flat" cmpd="sng" algn="ctr">
+          <a:solidFill>
+            <a:schemeClr val="phClr"/>
+          </a:solidFill>
+          <a:prstDash val="solid"/>
+          <a:miter lim="800000"/>
+        </a:ln>
+        <a:ln w="25400" cap="flat" cmpd="sng" algn="ctr">
+          <a:solidFill>
+            <a:schemeClr val="phClr"/>
+          </a:solidFill>
+          <a:prstDash val="solid"/>
+          <a:miter lim="800000"/>
+        </a:ln>
+      </a:lnStyleLst>
+      <a:effectStyleLst>
+        <a:effectStyle>
+          <a:effectLst/>
+        </a:effectStyle>
+        <a:effectStyle>
+          <a:effectLst/>
+        </a:effectStyle>
+        <a:effectStyle>
+          <a:effectLst>
+            <a:outerShdw blurRad="57150" dist="19050" dir="5400000" algn="ctr" rotWithShape="0">
+              <a:srgbClr val="000000">
+                <a:alpha val="63000"/>
+              </a:srgbClr>
+            </a:outerShdw>
+          </a:effectLst>
+        </a:effectStyle>
+      </a:effectStyleLst>
+      <a:bgFillStyleLst>
+        <a:solidFill>
+          <a:schemeClr val="phClr"/>
+        </a:solidFill>
+        <a:solidFill>
+          <a:schemeClr val="phClr">
+            <a:tint val="95000"/>
+            <a:satMod val="170000"/>
+          </a:schemeClr>
+        </a:solidFill>
+        <a:gradFill rotWithShape="1">
+          <a:gsLst>
+            <a:gs pos="0">
+              <a:schemeClr val="phClr">
+                <a:tint val="93000"/>
+                <a:satMod val="150000"/>
+                <a:shade val="98000"/>
+                <a:lumMod val="102000"/>
+              </a:schemeClr>
+            </a:gs>
+            <a:gs pos="50000">
+              <a:schemeClr val="phClr">
+                <a:tint val="98000"/>
+                <a:satMod val="130000"/>
+                <a:shade val="90000"/>
+                <a:lumMod val="103000"/>
+              </a:schemeClr>
+            </a:gs>
+            <a:gs pos="100000">
+              <a:schemeClr val="phClr">
+                <a:shade val="63000"/>
+                <a:satMod val="120000"/>
+              </a:schemeClr>
+            </a:gs>
+          </a:gsLst>
+          <a:lin ang="5400000" scaled="0"/>
+        </a:gradFill>
+      </a:bgFillStyleLst>
+    </a:fmtScheme>
+  </a:themeElements>
+  <a:objectDefaults>
+    <a:lnDef>
+      <a:spPr/>
+      <a:bodyPr/>
+      <a:lstStyle/>
+      <a:style>
+        <a:lnRef idx="2">
+          <a:schemeClr val="accent1"/>
+        </a:lnRef>
+        <a:fillRef idx="0">
+          <a:schemeClr val="accent1"/>
+        </a:fillRef>
+        <a:effectRef idx="1">
+          <a:schemeClr val="accent1"/>
+        </a:effectRef>
+        <a:fontRef idx="minor">
+          <a:schemeClr val="tx1"/>
+        </a:fontRef>
+      </a:style>
+    </a:lnDef>
+  </a:objectDefaults>
+  <a:extraClrSchemeLst/>
+  <a:extLst>
+    <a:ext uri="{05A4C25C-085E-4340-85A3-A5531E510DB2}">
+      <thm15:themeFamily xmlns:thm15="http://schemas.microsoft.com/office/thememl/2012/main" name="Office Theme" id="{2E142A2C-CD16-42D6-873A-C26D2A0506FA}" vid="{1BDDFF52-6CD6-40A5-AB3C-68EB2F1E4D0A}"/>
+    </a:ext>
+  </a:extLst>
+</a:theme>
 </file>